--- a/1-基础通识部分/第5课.pptx
+++ b/1-基础通识部分/第5课.pptx
@@ -5,31 +5,31 @@
     <p:sldMasterId id="2147483648" r:id="rId1"/>
   </p:sldMasterIdLst>
   <p:notesMasterIdLst>
-    <p:notesMasterId r:id="rId18"/>
+    <p:notesMasterId r:id="rId5"/>
   </p:notesMasterIdLst>
   <p:handoutMasterIdLst>
-    <p:handoutMasterId r:id="rId19"/>
+    <p:handoutMasterId r:id="rId20"/>
   </p:handoutMasterIdLst>
   <p:sldIdLst>
-    <p:sldId id="256" r:id="rId2"/>
-    <p:sldId id="294" r:id="rId3"/>
-    <p:sldId id="310" r:id="rId4"/>
-    <p:sldId id="311" r:id="rId5"/>
-    <p:sldId id="323" r:id="rId6"/>
-    <p:sldId id="324" r:id="rId7"/>
-    <p:sldId id="329" r:id="rId8"/>
-    <p:sldId id="327" r:id="rId9"/>
-    <p:sldId id="334" r:id="rId10"/>
-    <p:sldId id="335" r:id="rId11"/>
-    <p:sldId id="336" r:id="rId12"/>
-    <p:sldId id="325" r:id="rId13"/>
-    <p:sldId id="332" r:id="rId14"/>
-    <p:sldId id="337" r:id="rId15"/>
-    <p:sldId id="333" r:id="rId16"/>
-    <p:sldId id="274" r:id="rId17"/>
+    <p:sldId id="256" r:id="rId3"/>
+    <p:sldId id="294" r:id="rId4"/>
+    <p:sldId id="310" r:id="rId6"/>
+    <p:sldId id="311" r:id="rId7"/>
+    <p:sldId id="323" r:id="rId8"/>
+    <p:sldId id="324" r:id="rId9"/>
+    <p:sldId id="329" r:id="rId10"/>
+    <p:sldId id="327" r:id="rId11"/>
+    <p:sldId id="334" r:id="rId12"/>
+    <p:sldId id="335" r:id="rId13"/>
+    <p:sldId id="336" r:id="rId14"/>
+    <p:sldId id="325" r:id="rId15"/>
+    <p:sldId id="332" r:id="rId16"/>
+    <p:sldId id="337" r:id="rId17"/>
+    <p:sldId id="333" r:id="rId18"/>
+    <p:sldId id="274" r:id="rId19"/>
   </p:sldIdLst>
   <p:sldSz cx="12192000" cy="6858000"/>
-  <p:notesSz cx="7104063" cy="10234613"/>
+  <p:notesSz cx="7103745" cy="10234295"/>
   <p:defaultTextStyle>
     <a:defPPr>
       <a:defRPr lang="zh-CN"/>
@@ -226,7 +226,6 @@
           <a:p>
             <a:fld id="{0F9B84EA-7D68-4D60-9CB1-D50884785D1C}" type="datetimeFigureOut">
               <a:rPr lang="zh-CN" altLang="en-US" smtClean="0"/>
-              <a:t>2026/9/17</a:t>
             </a:fld>
             <a:endParaRPr lang="zh-CN" altLang="en-US"/>
           </a:p>
@@ -292,18 +291,12 @@
           <a:p>
             <a:fld id="{8D4E0FC9-F1F8-4FAE-9988-3BA365CFD46F}" type="slidenum">
               <a:rPr lang="zh-CN" altLang="en-US" smtClean="0"/>
-              <a:t>‹#›</a:t>
             </a:fld>
             <a:endParaRPr lang="zh-CN" altLang="en-US"/>
           </a:p>
         </p:txBody>
       </p:sp>
     </p:spTree>
-    <p:extLst>
-      <p:ext uri="{BB962C8B-B14F-4D97-AF65-F5344CB8AC3E}">
-        <p14:creationId xmlns:p14="http://schemas.microsoft.com/office/powerpoint/2010/main" val="1"/>
-      </p:ext>
-    </p:extLst>
   </p:cSld>
   <p:clrMap bg1="lt1" tx1="dk1" bg2="lt2" tx2="dk2" accent1="accent1" accent2="accent2" accent3="accent3" accent4="accent4" accent5="accent5" accent6="accent6" hlink="hlink" folHlink="folHlink"/>
 </p:handoutMaster>
@@ -391,7 +384,6 @@
           <a:p>
             <a:fld id="{D6C8D182-E4C8-4120-9249-FC9774456FFA}" type="datetimeFigureOut">
               <a:rPr lang="zh-CN" altLang="en-US" smtClean="0"/>
-              <a:t>2026/9/17</a:t>
             </a:fld>
             <a:endParaRPr lang="zh-CN" altLang="en-US"/>
           </a:p>
@@ -458,6 +450,7 @@
               <a:rPr lang="zh-CN" altLang="en-US"/>
               <a:t>编辑母版文本样式</a:t>
             </a:r>
+            <a:endParaRPr lang="zh-CN" altLang="en-US"/>
           </a:p>
           <a:p>
             <a:pPr lvl="1"/>
@@ -465,6 +458,7 @@
               <a:rPr lang="zh-CN" altLang="en-US"/>
               <a:t>第二级</a:t>
             </a:r>
+            <a:endParaRPr lang="zh-CN" altLang="en-US"/>
           </a:p>
           <a:p>
             <a:pPr lvl="2"/>
@@ -472,6 +466,7 @@
               <a:rPr lang="zh-CN" altLang="en-US"/>
               <a:t>第三级</a:t>
             </a:r>
+            <a:endParaRPr lang="zh-CN" altLang="en-US"/>
           </a:p>
           <a:p>
             <a:pPr lvl="3"/>
@@ -479,6 +474,7 @@
               <a:rPr lang="zh-CN" altLang="en-US"/>
               <a:t>第四级</a:t>
             </a:r>
+            <a:endParaRPr lang="zh-CN" altLang="en-US"/>
           </a:p>
           <a:p>
             <a:pPr lvl="4"/>
@@ -486,6 +482,7 @@
               <a:rPr lang="zh-CN" altLang="en-US"/>
               <a:t>第五级</a:t>
             </a:r>
+            <a:endParaRPr lang="zh-CN" altLang="en-US"/>
           </a:p>
         </p:txBody>
       </p:sp>
@@ -549,7 +546,6 @@
           <a:p>
             <a:fld id="{85D0DACE-38E0-42D2-9336-2B707D34BC6D}" type="slidenum">
               <a:rPr lang="zh-CN" altLang="en-US" smtClean="0"/>
-              <a:t>‹#›</a:t>
             </a:fld>
             <a:endParaRPr lang="zh-CN" altLang="en-US"/>
           </a:p>
@@ -761,6 +757,7 @@
               <a:rPr lang="zh-CN" altLang="en-US"/>
               <a:t>决定实际效果</a:t>
             </a:r>
+            <a:endParaRPr lang="zh-CN" altLang="en-US"/>
           </a:p>
         </p:txBody>
       </p:sp>
@@ -820,6 +817,7 @@
               <a:rPr lang="zh-CN" altLang="en-US"/>
               <a:t>最后，我再给大家介绍一种特殊的模型训练过程：微调</a:t>
             </a:r>
+            <a:endParaRPr lang="zh-CN" altLang="en-US"/>
           </a:p>
         </p:txBody>
       </p:sp>
@@ -879,6 +877,7 @@
               <a:rPr lang="zh-CN" altLang="en-US"/>
               <a:t>微调想要达到的目的和检索增强生成有些相似，所以两者有时候会被混淆，这里我们来做一下区分</a:t>
             </a:r>
+            <a:endParaRPr lang="zh-CN" altLang="en-US"/>
           </a:p>
         </p:txBody>
       </p:sp>
@@ -1058,6 +1057,7 @@
               <a:rPr lang="zh-CN" altLang="en-US"/>
               <a:t>首先，我们先来了解一下大模型都有什么样的能力差异</a:t>
             </a:r>
+            <a:endParaRPr lang="zh-CN" altLang="en-US"/>
           </a:p>
           <a:p>
             <a:pPr marL="171450" indent="-171450">
@@ -1079,6 +1079,7 @@
               <a:rPr lang="zh-CN" altLang="en-US"/>
               <a:t>虽然现在的大模型大都使用了一种叫做“混合专家”的设计模式，使得整体的能力都比较均衡，但是实际使用之后就会发现，不同厂商的模型输出风格还是会不一样的</a:t>
             </a:r>
+            <a:endParaRPr lang="zh-CN" altLang="en-US"/>
           </a:p>
           <a:p>
             <a:pPr marL="628650" lvl="1" indent="-171450">
@@ -1093,6 +1094,7 @@
               <a:rPr lang="zh-CN" altLang="en-US"/>
               <a:t>会进行很长的思考，但回答比较简略，“内心戏丰富但沉默寡言的闷骚型模型”</a:t>
             </a:r>
+            <a:endParaRPr lang="zh-CN" altLang="en-US"/>
           </a:p>
           <a:p>
             <a:pPr marL="628650" lvl="1" indent="-171450">
@@ -1107,6 +1109,7 @@
               <a:rPr lang="zh-CN" altLang="en-US"/>
               <a:t>思考很快，但是回答会很长，会分很多小节、列很多列表，“直言快语的唠叨型模型”</a:t>
             </a:r>
+            <a:endParaRPr lang="zh-CN" altLang="en-US"/>
           </a:p>
         </p:txBody>
       </p:sp>
@@ -1170,6 +1173,7 @@
               <a:rPr lang="zh-CN" altLang="en-US"/>
               <a:t>模型能力差异的最主要来源就是模型的训练过程。就好比一个人的能力与其他人的差异很大程度上来源于他受过的教育一样。</a:t>
             </a:r>
+            <a:endParaRPr lang="zh-CN" altLang="en-US"/>
           </a:p>
           <a:p>
             <a:pPr indent="0">
@@ -1213,6 +1217,7 @@
               <a:rPr lang="en-US" altLang="zh-CN"/>
               <a:t>……</a:t>
             </a:r>
+            <a:endParaRPr lang="en-US" altLang="zh-CN"/>
           </a:p>
         </p:txBody>
       </p:sp>
@@ -1276,6 +1281,7 @@
               <a:rPr lang="zh-CN" altLang="en-US"/>
               <a:t>模型训练的本质：函数空间寻找最小值</a:t>
             </a:r>
+            <a:endParaRPr lang="zh-CN" altLang="en-US"/>
           </a:p>
           <a:p>
             <a:pPr marL="628650" lvl="1" indent="-171450">
@@ -1286,6 +1292,7 @@
               <a:rPr lang="zh-CN" altLang="en-US"/>
               <a:t>类比下山坡，空间形状是由训练数据勾勒出来的</a:t>
             </a:r>
+            <a:endParaRPr lang="zh-CN" altLang="en-US"/>
           </a:p>
           <a:p>
             <a:pPr marL="628650" lvl="1" indent="-171450">
@@ -1296,6 +1303,7 @@
               <a:rPr lang="zh-CN" altLang="en-US"/>
               <a:t>从一个出发点走到一个坑底，就完成了一次训练</a:t>
             </a:r>
+            <a:endParaRPr lang="zh-CN" altLang="en-US"/>
           </a:p>
           <a:p>
             <a:pPr indent="0">
@@ -1404,6 +1412,9 @@
               </a:rPr>
               <a:t>偏好优化/强化训练：学习奥赛场景下的解题技巧</a:t>
             </a:r>
+            <a:endParaRPr lang="zh-CN" altLang="en-US">
+              <a:sym typeface="+mn-ea"/>
+            </a:endParaRPr>
           </a:p>
           <a:p>
             <a:pPr marL="171450" lvl="0" indent="-171450">
@@ -1488,6 +1499,7 @@
               <a:rPr lang="zh-CN" altLang="en-US" dirty="0"/>
               <a:t>模型是通过什么格式的数据进行训练的呢？</a:t>
             </a:r>
+            <a:endParaRPr lang="zh-CN" altLang="en-US" dirty="0"/>
           </a:p>
           <a:p>
             <a:endParaRPr lang="zh-CN" altLang="en-US" dirty="0"/>
@@ -1501,6 +1513,7 @@
               <a:rPr lang="zh-CN" altLang="en-US" dirty="0"/>
               <a:t>预训练：普通文本（书籍、文章、代码）</a:t>
             </a:r>
+            <a:endParaRPr lang="zh-CN" altLang="en-US" dirty="0"/>
           </a:p>
           <a:p>
             <a:pPr marL="171450" indent="-171450">
@@ -1527,6 +1540,7 @@
               <a:rPr lang="zh-CN" altLang="en-US" dirty="0"/>
               <a:t>把文本划分为对应到不同身份的多个部分</a:t>
             </a:r>
+            <a:endParaRPr lang="zh-CN" altLang="en-US" dirty="0"/>
           </a:p>
           <a:p>
             <a:pPr marL="628650" lvl="1" indent="-171450">
@@ -1537,6 +1551,7 @@
               <a:rPr lang="zh-CN" altLang="en-US" dirty="0"/>
               <a:t>系统：固定的任务说明、角色定位</a:t>
             </a:r>
+            <a:endParaRPr lang="zh-CN" altLang="en-US" dirty="0"/>
           </a:p>
           <a:p>
             <a:pPr marL="628650" lvl="1" indent="-171450">
@@ -1547,6 +1562,7 @@
               <a:rPr lang="zh-CN" altLang="en-US" dirty="0"/>
               <a:t>用户：用户可能会说的内容</a:t>
             </a:r>
+            <a:endParaRPr lang="zh-CN" altLang="en-US" dirty="0"/>
           </a:p>
           <a:p>
             <a:pPr marL="628650" lvl="1" indent="-171450">
@@ -1557,6 +1573,7 @@
               <a:rPr lang="zh-CN" altLang="en-US" dirty="0"/>
               <a:t>助手：大模型的回复</a:t>
             </a:r>
+            <a:endParaRPr lang="zh-CN" altLang="en-US" dirty="0"/>
           </a:p>
           <a:p>
             <a:pPr marL="171450" lvl="0" indent="-171450">
@@ -1567,6 +1584,7 @@
               <a:rPr lang="zh-CN" altLang="en-US" dirty="0"/>
               <a:t>其他的角色：</a:t>
             </a:r>
+            <a:endParaRPr lang="zh-CN" altLang="en-US" dirty="0"/>
           </a:p>
           <a:p>
             <a:pPr marL="628650" lvl="1" indent="-171450">
@@ -1577,6 +1595,7 @@
               <a:rPr lang="zh-CN" altLang="en-US" dirty="0"/>
               <a:t>工具</a:t>
             </a:r>
+            <a:endParaRPr lang="zh-CN" altLang="en-US" dirty="0"/>
           </a:p>
           <a:p>
             <a:pPr marL="628650" lvl="1" indent="-171450">
@@ -1587,6 +1606,7 @@
               <a:rPr lang="zh-CN" altLang="en-US" dirty="0"/>
               <a:t>开发者</a:t>
             </a:r>
+            <a:endParaRPr lang="zh-CN" altLang="en-US" dirty="0"/>
           </a:p>
         </p:txBody>
       </p:sp>
@@ -1646,6 +1666,7 @@
               <a:rPr lang="zh-CN" altLang="en-US"/>
               <a:t>为什么要让文本关联到多个不同的身份呢？</a:t>
             </a:r>
+            <a:endParaRPr lang="zh-CN" altLang="en-US"/>
           </a:p>
           <a:p>
             <a:pPr marL="171450" lvl="1" indent="-171450">
@@ -1658,6 +1679,9 @@
               </a:rPr>
               <a:t>目的：通过不同身份让大模型理解文本的构成，知道后面应该如何续写</a:t>
             </a:r>
+            <a:endParaRPr lang="zh-CN" altLang="en-US">
+              <a:sym typeface="+mn-ea"/>
+            </a:endParaRPr>
           </a:p>
           <a:p>
             <a:pPr marL="171450" lvl="1" indent="-171450">
@@ -1668,6 +1692,7 @@
               <a:rPr lang="zh-CN" altLang="en-US"/>
               <a:t>我们结合推理过程来看一下</a:t>
             </a:r>
+            <a:endParaRPr lang="zh-CN" altLang="en-US"/>
           </a:p>
         </p:txBody>
       </p:sp>
@@ -1731,6 +1756,7 @@
               <a:rPr lang="zh-CN" altLang="en-US"/>
               <a:t>模型决定能力上限</a:t>
             </a:r>
+            <a:endParaRPr lang="zh-CN" altLang="en-US"/>
           </a:p>
         </p:txBody>
       </p:sp>
@@ -1804,7 +1830,6 @@
             <a:pPr algn="ctr">
               <a:defRPr/>
             </a:pPr>
-            <a:endParaRPr/>
           </a:p>
         </p:txBody>
       </p:sp>
@@ -1880,7 +1905,6 @@
             <a:pPr algn="ctr">
               <a:defRPr/>
             </a:pPr>
-            <a:endParaRPr/>
           </a:p>
         </p:txBody>
       </p:sp>
@@ -1956,7 +1980,6 @@
             <a:pPr algn="ctr">
               <a:defRPr/>
             </a:pPr>
-            <a:endParaRPr/>
           </a:p>
         </p:txBody>
       </p:sp>
@@ -2032,7 +2055,6 @@
             <a:pPr algn="ctr">
               <a:defRPr/>
             </a:pPr>
-            <a:endParaRPr/>
           </a:p>
         </p:txBody>
       </p:sp>
@@ -2104,7 +2126,6 @@
             <a:pPr algn="ctr">
               <a:defRPr/>
             </a:pPr>
-            <a:endParaRPr/>
           </a:p>
         </p:txBody>
       </p:sp>
@@ -2176,7 +2197,6 @@
             <a:pPr algn="ctr">
               <a:defRPr/>
             </a:pPr>
-            <a:endParaRPr/>
           </a:p>
         </p:txBody>
       </p:sp>
@@ -2258,7 +2278,6 @@
             <a:pPr algn="ctr">
               <a:defRPr/>
             </a:pPr>
-            <a:endParaRPr/>
           </a:p>
         </p:txBody>
       </p:sp>
@@ -2339,6 +2358,7 @@
               <a:rPr lang="zh-CN" altLang="en-US" dirty="0"/>
               <a:t>单击此处添加标题</a:t>
             </a:r>
+            <a:endParaRPr lang="zh-CN" altLang="en-US" dirty="0"/>
           </a:p>
         </p:txBody>
       </p:sp>
@@ -2359,7 +2379,6 @@
           <a:p>
             <a:fld id="{760FBDFE-C587-4B4C-A407-44438C67B59E}" type="datetimeFigureOut">
               <a:rPr lang="zh-CN" altLang="en-US" smtClean="0"/>
-              <a:t>2026/9/17</a:t>
             </a:fld>
             <a:endParaRPr lang="zh-CN" altLang="en-US"/>
           </a:p>
@@ -2401,7 +2420,6 @@
           <a:p>
             <a:fld id="{49AE70B2-8BF9-45C0-BB95-33D1B9D3A854}" type="slidenum">
               <a:rPr lang="zh-CN" altLang="en-US" smtClean="0"/>
-              <a:t>‹#›</a:t>
             </a:fld>
             <a:endParaRPr lang="zh-CN" altLang="en-US"/>
           </a:p>
@@ -2479,6 +2497,7 @@
               <a:rPr lang="zh-CN" altLang="en-US" dirty="0"/>
               <a:t>单击此处添加副标题</a:t>
             </a:r>
+            <a:endParaRPr lang="zh-CN" altLang="en-US" dirty="0"/>
           </a:p>
         </p:txBody>
       </p:sp>
@@ -2570,6 +2589,7 @@
               <a:rPr lang="zh-CN" altLang="en-US"/>
               <a:t>【日期】</a:t>
             </a:r>
+            <a:endParaRPr lang="zh-CN" altLang="en-US"/>
           </a:p>
           <a:p>
             <a:pPr lvl="0"/>
@@ -2620,7 +2640,6 @@
           <a:p>
             <a:fld id="{760FBDFE-C587-4B4C-A407-44438C67B59E}" type="datetimeFigureOut">
               <a:rPr lang="zh-CN" altLang="en-US" smtClean="0"/>
-              <a:t>2026/9/17</a:t>
             </a:fld>
             <a:endParaRPr lang="zh-CN" altLang="en-US"/>
           </a:p>
@@ -2662,7 +2681,6 @@
           <a:p>
             <a:fld id="{49AE70B2-8BF9-45C0-BB95-33D1B9D3A854}" type="slidenum">
               <a:rPr lang="zh-CN" altLang="en-US" smtClean="0"/>
-              <a:t>‹#›</a:t>
             </a:fld>
             <a:endParaRPr lang="zh-CN" altLang="en-US"/>
           </a:p>
@@ -2732,6 +2750,7 @@
               <a:rPr lang="zh-CN" altLang="en-US" dirty="0"/>
               <a:t>单击此处编辑标题</a:t>
             </a:r>
+            <a:endParaRPr lang="zh-CN" altLang="en-US" dirty="0"/>
           </a:p>
         </p:txBody>
       </p:sp>
@@ -2863,6 +2882,7 @@
               <a:rPr lang="zh-CN" altLang="en-US" dirty="0"/>
               <a:t>单击此处编辑母版文本样式</a:t>
             </a:r>
+            <a:endParaRPr lang="zh-CN" altLang="en-US" dirty="0"/>
           </a:p>
         </p:txBody>
       </p:sp>
@@ -2883,7 +2903,6 @@
           <a:p>
             <a:fld id="{9EFD9D74-47D9-4702-A33C-335B63B48DBF}" type="datetimeFigureOut">
               <a:rPr lang="zh-CN" altLang="en-US" smtClean="0"/>
-              <a:t>2026/9/17</a:t>
             </a:fld>
             <a:endParaRPr lang="zh-CN" altLang="en-US" dirty="0"/>
           </a:p>
@@ -2925,7 +2944,6 @@
           <a:p>
             <a:fld id="{FABC47A4-756D-490B-A52F-7D9E2C9FC05F}" type="slidenum">
               <a:rPr lang="zh-CN" altLang="en-US" smtClean="0"/>
-              <a:t>‹#›</a:t>
             </a:fld>
             <a:endParaRPr lang="zh-CN" altLang="en-US"/>
           </a:p>
@@ -2987,6 +3005,7 @@
               <a:rPr lang="zh-CN" altLang="en-US"/>
               <a:t>单击此处编辑母版标题样式</a:t>
             </a:r>
+            <a:endParaRPr lang="zh-CN" altLang="en-US"/>
           </a:p>
         </p:txBody>
       </p:sp>
@@ -3015,6 +3034,7 @@
               <a:rPr lang="zh-CN" altLang="en-US" dirty="0"/>
               <a:t>单击此处编辑母版文本样式</a:t>
             </a:r>
+            <a:endParaRPr lang="zh-CN" altLang="en-US" dirty="0"/>
           </a:p>
           <a:p>
             <a:pPr lvl="1"/>
@@ -3022,6 +3042,7 @@
               <a:rPr lang="zh-CN" altLang="en-US" dirty="0"/>
               <a:t>第二级</a:t>
             </a:r>
+            <a:endParaRPr lang="zh-CN" altLang="en-US" dirty="0"/>
           </a:p>
           <a:p>
             <a:pPr lvl="2"/>
@@ -3029,6 +3050,7 @@
               <a:rPr lang="zh-CN" altLang="en-US" dirty="0"/>
               <a:t>第三级</a:t>
             </a:r>
+            <a:endParaRPr lang="zh-CN" altLang="en-US" dirty="0"/>
           </a:p>
           <a:p>
             <a:pPr lvl="3"/>
@@ -3036,6 +3058,7 @@
               <a:rPr lang="zh-CN" altLang="en-US" dirty="0"/>
               <a:t>第四级</a:t>
             </a:r>
+            <a:endParaRPr lang="zh-CN" altLang="en-US" dirty="0"/>
           </a:p>
           <a:p>
             <a:pPr lvl="4"/>
@@ -3043,6 +3066,7 @@
               <a:rPr lang="zh-CN" altLang="en-US" dirty="0"/>
               <a:t>第五级</a:t>
             </a:r>
+            <a:endParaRPr lang="zh-CN" altLang="en-US" dirty="0"/>
           </a:p>
         </p:txBody>
       </p:sp>
@@ -3063,7 +3087,6 @@
           <a:p>
             <a:fld id="{760FBDFE-C587-4B4C-A407-44438C67B59E}" type="datetimeFigureOut">
               <a:rPr lang="zh-CN" altLang="en-US" smtClean="0"/>
-              <a:t>2026/9/17</a:t>
             </a:fld>
             <a:endParaRPr lang="zh-CN" altLang="en-US"/>
           </a:p>
@@ -3105,7 +3128,6 @@
           <a:p>
             <a:fld id="{49AE70B2-8BF9-45C0-BB95-33D1B9D3A854}" type="slidenum">
               <a:rPr lang="zh-CN" altLang="en-US" smtClean="0"/>
-              <a:t>‹#›</a:t>
             </a:fld>
             <a:endParaRPr lang="zh-CN" altLang="en-US"/>
           </a:p>
@@ -3154,7 +3176,6 @@
           <a:p>
             <a:fld id="{760FBDFE-C587-4B4C-A407-44438C67B59E}" type="datetimeFigureOut">
               <a:rPr lang="zh-CN" altLang="en-US" smtClean="0"/>
-              <a:t>2026/9/17</a:t>
             </a:fld>
             <a:endParaRPr lang="zh-CN" altLang="en-US"/>
           </a:p>
@@ -3196,7 +3217,6 @@
           <a:p>
             <a:fld id="{49AE70B2-8BF9-45C0-BB95-33D1B9D3A854}" type="slidenum">
               <a:rPr lang="zh-CN" altLang="en-US" smtClean="0"/>
-              <a:t>‹#›</a:t>
             </a:fld>
             <a:endParaRPr lang="zh-CN" altLang="en-US"/>
           </a:p>
@@ -3227,6 +3247,7 @@
               <a:rPr lang="zh-CN" altLang="en-US" dirty="0"/>
               <a:t>单击此处编辑母版文本样式</a:t>
             </a:r>
+            <a:endParaRPr lang="zh-CN" altLang="en-US" dirty="0"/>
           </a:p>
           <a:p>
             <a:pPr lvl="1"/>
@@ -3234,6 +3255,7 @@
               <a:rPr lang="zh-CN" altLang="en-US" dirty="0"/>
               <a:t>第二级</a:t>
             </a:r>
+            <a:endParaRPr lang="zh-CN" altLang="en-US" dirty="0"/>
           </a:p>
           <a:p>
             <a:pPr lvl="2"/>
@@ -3241,6 +3263,7 @@
               <a:rPr lang="zh-CN" altLang="en-US" dirty="0"/>
               <a:t>第三级</a:t>
             </a:r>
+            <a:endParaRPr lang="zh-CN" altLang="en-US" dirty="0"/>
           </a:p>
           <a:p>
             <a:pPr lvl="3"/>
@@ -3248,6 +3271,7 @@
               <a:rPr lang="zh-CN" altLang="en-US" dirty="0"/>
               <a:t>第四级</a:t>
             </a:r>
+            <a:endParaRPr lang="zh-CN" altLang="en-US" dirty="0"/>
           </a:p>
           <a:p>
             <a:pPr lvl="4"/>
@@ -3255,6 +3279,7 @@
               <a:rPr lang="zh-CN" altLang="en-US" dirty="0"/>
               <a:t>第五级</a:t>
             </a:r>
+            <a:endParaRPr lang="zh-CN" altLang="en-US" dirty="0"/>
           </a:p>
         </p:txBody>
       </p:sp>
@@ -3356,7 +3381,6 @@
             <a:pPr algn="ctr">
               <a:defRPr/>
             </a:pPr>
-            <a:endParaRPr/>
           </a:p>
         </p:txBody>
       </p:sp>
@@ -3432,7 +3456,6 @@
             <a:pPr algn="ctr">
               <a:defRPr/>
             </a:pPr>
-            <a:endParaRPr/>
           </a:p>
         </p:txBody>
       </p:sp>
@@ -3453,7 +3476,6 @@
           <a:p>
             <a:fld id="{760FBDFE-C587-4B4C-A407-44438C67B59E}" type="datetimeFigureOut">
               <a:rPr lang="zh-CN" altLang="en-US" smtClean="0"/>
-              <a:t>2026/9/17</a:t>
             </a:fld>
             <a:endParaRPr lang="zh-CN" altLang="en-US"/>
           </a:p>
@@ -3495,7 +3517,6 @@
           <a:p>
             <a:fld id="{49AE70B2-8BF9-45C0-BB95-33D1B9D3A854}" type="slidenum">
               <a:rPr lang="zh-CN" altLang="en-US" smtClean="0"/>
-              <a:t>‹#›</a:t>
             </a:fld>
             <a:endParaRPr lang="zh-CN" altLang="en-US"/>
           </a:p>
@@ -3638,13 +3659,13 @@
           <p:nvPr userDrawn="1"/>
         </p:nvPicPr>
         <p:blipFill>
-          <a:blip>
+          <a:blip r:embed="rId2">
             <a:extLst>
               <a:ext uri="{28A0092B-C50C-407E-A947-70E740481C1C}">
                 <a14:useLocalDpi xmlns:a14="http://schemas.microsoft.com/office/drawing/2010/main" val="0"/>
               </a:ext>
               <a:ext uri="{96DAC541-7B7A-43D3-8B79-37D633B846F1}">
-                <asvg:svgBlip xmlns:asvg="http://schemas.microsoft.com/office/drawing/2016/SVG/main" r:embed="rId2"/>
+                <asvg:svgBlip xmlns:asvg="http://schemas.microsoft.com/office/drawing/2016/SVG/main" r:embed="rId3"/>
               </a:ext>
             </a:extLst>
           </a:blip>
@@ -3703,13 +3724,13 @@
           <p:nvPr userDrawn="1"/>
         </p:nvPicPr>
         <p:blipFill>
-          <a:blip>
+          <a:blip r:embed="rId4">
             <a:extLst>
               <a:ext uri="{28A0092B-C50C-407E-A947-70E740481C1C}">
                 <a14:useLocalDpi xmlns:a14="http://schemas.microsoft.com/office/drawing/2010/main" val="0"/>
               </a:ext>
               <a:ext uri="{96DAC541-7B7A-43D3-8B79-37D633B846F1}">
-                <asvg:svgBlip xmlns:asvg="http://schemas.microsoft.com/office/drawing/2016/SVG/main" r:embed="rId3"/>
+                <asvg:svgBlip xmlns:asvg="http://schemas.microsoft.com/office/drawing/2016/SVG/main" r:embed="rId5"/>
               </a:ext>
             </a:extLst>
           </a:blip>
@@ -3768,13 +3789,13 @@
           <p:nvPr userDrawn="1"/>
         </p:nvPicPr>
         <p:blipFill>
-          <a:blip>
+          <a:blip r:embed="rId6">
             <a:extLst>
               <a:ext uri="{28A0092B-C50C-407E-A947-70E740481C1C}">
                 <a14:useLocalDpi xmlns:a14="http://schemas.microsoft.com/office/drawing/2010/main" val="0"/>
               </a:ext>
               <a:ext uri="{96DAC541-7B7A-43D3-8B79-37D633B846F1}">
-                <asvg:svgBlip xmlns:asvg="http://schemas.microsoft.com/office/drawing/2016/SVG/main" r:embed="rId4"/>
+                <asvg:svgBlip xmlns:asvg="http://schemas.microsoft.com/office/drawing/2016/SVG/main" r:embed="rId7"/>
               </a:ext>
             </a:extLst>
           </a:blip>
@@ -3892,6 +3913,7 @@
               <a:rPr altLang="zh-CN"/>
               <a:t>XXX</a:t>
             </a:r>
+            <a:endParaRPr altLang="zh-CN"/>
           </a:p>
         </p:txBody>
       </p:sp>
@@ -3948,6 +3970,7 @@
               <a:rPr lang="zh-CN" altLang="en-US"/>
               <a:t>事实</a:t>
             </a:r>
+            <a:endParaRPr lang="zh-CN" altLang="en-US"/>
           </a:p>
         </p:txBody>
       </p:sp>
@@ -4072,7 +4095,6 @@
             <a:pPr algn="ctr">
               <a:defRPr/>
             </a:pPr>
-            <a:endParaRPr/>
           </a:p>
         </p:txBody>
       </p:sp>
@@ -4121,7 +4143,6 @@
             <a:pPr algn="ctr">
               <a:defRPr/>
             </a:pPr>
-            <a:endParaRPr/>
           </a:p>
         </p:txBody>
       </p:sp>
@@ -4170,6 +4191,7 @@
               <a:rPr lang="zh-CN" altLang="en-US" dirty="0"/>
               <a:t>单击此处编辑母版标题样式</a:t>
             </a:r>
+            <a:endParaRPr lang="zh-CN" altLang="en-US" dirty="0"/>
           </a:p>
         </p:txBody>
       </p:sp>
@@ -4266,6 +4288,7 @@
               <a:rPr lang="zh-CN" altLang="en-US" dirty="0"/>
               <a:t>单击此处编辑母版文本样式</a:t>
             </a:r>
+            <a:endParaRPr lang="zh-CN" altLang="en-US" dirty="0"/>
           </a:p>
           <a:p>
             <a:pPr lvl="1"/>
@@ -4273,6 +4296,7 @@
               <a:rPr lang="zh-CN" altLang="en-US" dirty="0"/>
               <a:t>第二级</a:t>
             </a:r>
+            <a:endParaRPr lang="zh-CN" altLang="en-US" dirty="0"/>
           </a:p>
           <a:p>
             <a:pPr lvl="2"/>
@@ -4280,6 +4304,7 @@
               <a:rPr lang="zh-CN" altLang="en-US" dirty="0"/>
               <a:t>第三级</a:t>
             </a:r>
+            <a:endParaRPr lang="zh-CN" altLang="en-US" dirty="0"/>
           </a:p>
           <a:p>
             <a:pPr lvl="3"/>
@@ -4287,6 +4312,7 @@
               <a:rPr lang="zh-CN" altLang="en-US" dirty="0"/>
               <a:t>第四级</a:t>
             </a:r>
+            <a:endParaRPr lang="zh-CN" altLang="en-US" dirty="0"/>
           </a:p>
           <a:p>
             <a:pPr lvl="4"/>
@@ -4294,6 +4320,7 @@
               <a:rPr lang="zh-CN" altLang="en-US" dirty="0"/>
               <a:t>第五级</a:t>
             </a:r>
+            <a:endParaRPr lang="zh-CN" altLang="en-US" dirty="0"/>
           </a:p>
         </p:txBody>
       </p:sp>
@@ -4323,7 +4350,6 @@
           <a:p>
             <a:fld id="{760FBDFE-C587-4B4C-A407-44438C67B59E}" type="datetimeFigureOut">
               <a:rPr lang="zh-CN" altLang="en-US" smtClean="0"/>
-              <a:t>2026/9/17</a:t>
             </a:fld>
             <a:endParaRPr lang="zh-CN" altLang="en-US"/>
           </a:p>
@@ -4379,7 +4405,6 @@
           <a:p>
             <a:fld id="{49AE70B2-8BF9-45C0-BB95-33D1B9D3A854}" type="slidenum">
               <a:rPr lang="zh-CN" altLang="en-US" smtClean="0"/>
-              <a:t>‹#›</a:t>
             </a:fld>
             <a:endParaRPr lang="en-US" altLang="zh-CN"/>
           </a:p>
@@ -4419,7 +4444,6 @@
             <a:pPr algn="ctr">
               <a:defRPr/>
             </a:pPr>
-            <a:endParaRPr/>
           </a:p>
         </p:txBody>
       </p:sp>
@@ -4526,7 +4550,6 @@
             <a:pPr algn="ctr">
               <a:defRPr/>
             </a:pPr>
-            <a:endParaRPr/>
           </a:p>
         </p:txBody>
       </p:sp>
@@ -4575,7 +4598,6 @@
             <a:pPr algn="ctr">
               <a:defRPr/>
             </a:pPr>
-            <a:endParaRPr/>
           </a:p>
         </p:txBody>
       </p:sp>
@@ -4624,6 +4646,7 @@
               <a:rPr lang="zh-CN" altLang="en-US" dirty="0"/>
               <a:t>单击此处编辑母版标题样式</a:t>
             </a:r>
+            <a:endParaRPr lang="zh-CN" altLang="en-US" dirty="0"/>
           </a:p>
         </p:txBody>
       </p:sp>
@@ -4720,6 +4743,7 @@
               <a:rPr lang="zh-CN" altLang="en-US" dirty="0"/>
               <a:t>单击此处编辑母版文本样式</a:t>
             </a:r>
+            <a:endParaRPr lang="zh-CN" altLang="en-US" dirty="0"/>
           </a:p>
           <a:p>
             <a:pPr lvl="1"/>
@@ -4727,6 +4751,7 @@
               <a:rPr lang="zh-CN" altLang="en-US" dirty="0"/>
               <a:t>第二级</a:t>
             </a:r>
+            <a:endParaRPr lang="zh-CN" altLang="en-US" dirty="0"/>
           </a:p>
           <a:p>
             <a:pPr lvl="2"/>
@@ -4734,6 +4759,7 @@
               <a:rPr lang="zh-CN" altLang="en-US" dirty="0"/>
               <a:t>第三级</a:t>
             </a:r>
+            <a:endParaRPr lang="zh-CN" altLang="en-US" dirty="0"/>
           </a:p>
           <a:p>
             <a:pPr lvl="3"/>
@@ -4741,6 +4767,7 @@
               <a:rPr lang="zh-CN" altLang="en-US" dirty="0"/>
               <a:t>第四级</a:t>
             </a:r>
+            <a:endParaRPr lang="zh-CN" altLang="en-US" dirty="0"/>
           </a:p>
           <a:p>
             <a:pPr lvl="4"/>
@@ -4748,6 +4775,7 @@
               <a:rPr lang="zh-CN" altLang="en-US" dirty="0"/>
               <a:t>第五级</a:t>
             </a:r>
+            <a:endParaRPr lang="zh-CN" altLang="en-US" dirty="0"/>
           </a:p>
         </p:txBody>
       </p:sp>
@@ -4777,7 +4805,6 @@
           <a:p>
             <a:fld id="{760FBDFE-C587-4B4C-A407-44438C67B59E}" type="datetimeFigureOut">
               <a:rPr lang="zh-CN" altLang="en-US" smtClean="0"/>
-              <a:t>2026/9/17</a:t>
             </a:fld>
             <a:endParaRPr lang="zh-CN" altLang="en-US"/>
           </a:p>
@@ -4833,7 +4860,6 @@
           <a:p>
             <a:fld id="{49AE70B2-8BF9-45C0-BB95-33D1B9D3A854}" type="slidenum">
               <a:rPr lang="zh-CN" altLang="en-US" smtClean="0"/>
-              <a:t>‹#›</a:t>
             </a:fld>
             <a:endParaRPr lang="en-US" altLang="zh-CN"/>
           </a:p>
@@ -4873,7 +4899,6 @@
             <a:pPr algn="ctr">
               <a:defRPr/>
             </a:pPr>
-            <a:endParaRPr/>
           </a:p>
         </p:txBody>
       </p:sp>
@@ -4952,7 +4977,6 @@
             <a:pPr algn="ctr">
               <a:defRPr/>
             </a:pPr>
-            <a:endParaRPr/>
           </a:p>
         </p:txBody>
       </p:sp>
@@ -4986,6 +5010,7 @@
               <a:rPr lang="zh-CN" altLang="en-US"/>
               <a:t>插入定义文本</a:t>
             </a:r>
+            <a:endParaRPr lang="zh-CN" altLang="en-US"/>
           </a:p>
         </p:txBody>
       </p:sp>
@@ -5077,7 +5102,6 @@
             <a:pPr algn="ctr">
               <a:defRPr/>
             </a:pPr>
-            <a:endParaRPr/>
           </a:p>
         </p:txBody>
       </p:sp>
@@ -5143,7 +5167,6 @@
             <a:pPr algn="ctr">
               <a:defRPr/>
             </a:pPr>
-            <a:endParaRPr/>
           </a:p>
         </p:txBody>
       </p:sp>
@@ -5192,6 +5215,7 @@
               <a:rPr lang="zh-CN" altLang="en-US" dirty="0"/>
               <a:t>【思考与讨论】</a:t>
             </a:r>
+            <a:endParaRPr lang="zh-CN" altLang="en-US" dirty="0"/>
           </a:p>
         </p:txBody>
       </p:sp>
@@ -5293,6 +5317,7 @@
               <a:rPr lang="zh-CN" altLang="en-US" dirty="0"/>
               <a:t>【提出一个开放性问题,引导学生思考】</a:t>
             </a:r>
+            <a:endParaRPr lang="zh-CN" altLang="en-US" dirty="0"/>
           </a:p>
         </p:txBody>
       </p:sp>
@@ -5322,7 +5347,6 @@
           <a:p>
             <a:fld id="{760FBDFE-C587-4B4C-A407-44438C67B59E}" type="datetimeFigureOut">
               <a:rPr lang="zh-CN" altLang="en-US" smtClean="0"/>
-              <a:t>2026/9/17</a:t>
             </a:fld>
             <a:endParaRPr lang="zh-CN" altLang="en-US"/>
           </a:p>
@@ -5378,7 +5402,6 @@
           <a:p>
             <a:fld id="{49AE70B2-8BF9-45C0-BB95-33D1B9D3A854}" type="slidenum">
               <a:rPr lang="zh-CN" altLang="en-US" smtClean="0"/>
-              <a:t>‹#›</a:t>
             </a:fld>
             <a:endParaRPr lang="en-US" altLang="zh-CN"/>
           </a:p>
@@ -5494,7 +5517,6 @@
             <a:pPr algn="ctr">
               <a:defRPr/>
             </a:pPr>
-            <a:endParaRPr/>
           </a:p>
         </p:txBody>
       </p:sp>
@@ -5652,6 +5674,7 @@
               <a:rPr lang="zh-CN" altLang="en-US" dirty="0"/>
               <a:t>【提示:可以分组讨论 / 举手回答 / 课后思考】</a:t>
             </a:r>
+            <a:endParaRPr lang="zh-CN" altLang="en-US" dirty="0"/>
           </a:p>
         </p:txBody>
       </p:sp>
@@ -5719,6 +5742,7 @@
               <a:rPr lang="zh-CN" altLang="en-US" dirty="0"/>
               <a:t>单击此处编辑母版标题样式</a:t>
             </a:r>
+            <a:endParaRPr lang="zh-CN" altLang="en-US" dirty="0"/>
           </a:p>
         </p:txBody>
       </p:sp>
@@ -5838,6 +5862,7 @@
               <a:rPr lang="zh-CN" altLang="en-US" dirty="0"/>
               <a:t>单击此处编辑母版文本样式</a:t>
             </a:r>
+            <a:endParaRPr lang="zh-CN" altLang="en-US" dirty="0"/>
           </a:p>
         </p:txBody>
       </p:sp>
@@ -5858,7 +5883,6 @@
           <a:p>
             <a:fld id="{760FBDFE-C587-4B4C-A407-44438C67B59E}" type="datetimeFigureOut">
               <a:rPr lang="zh-CN" altLang="en-US" smtClean="0"/>
-              <a:t>2026/9/17</a:t>
             </a:fld>
             <a:endParaRPr lang="zh-CN" altLang="en-US"/>
           </a:p>
@@ -5900,7 +5924,6 @@
           <a:p>
             <a:fld id="{49AE70B2-8BF9-45C0-BB95-33D1B9D3A854}" type="slidenum">
               <a:rPr lang="zh-CN" altLang="en-US" smtClean="0"/>
-              <a:t>‹#›</a:t>
             </a:fld>
             <a:endParaRPr lang="zh-CN" altLang="en-US"/>
           </a:p>
@@ -5970,6 +5993,7 @@
               <a:rPr lang="zh-CN" altLang="en-US" dirty="0"/>
               <a:t>单击此处编辑母版标题样式</a:t>
             </a:r>
+            <a:endParaRPr lang="zh-CN" altLang="en-US" dirty="0"/>
           </a:p>
         </p:txBody>
       </p:sp>
@@ -6066,6 +6090,7 @@
               <a:rPr lang="zh-CN" altLang="en-US" dirty="0"/>
               <a:t>单击此处编辑母版文本样式</a:t>
             </a:r>
+            <a:endParaRPr lang="zh-CN" altLang="en-US" dirty="0"/>
           </a:p>
           <a:p>
             <a:pPr lvl="1"/>
@@ -6073,6 +6098,7 @@
               <a:rPr lang="zh-CN" altLang="en-US" dirty="0"/>
               <a:t>第二级</a:t>
             </a:r>
+            <a:endParaRPr lang="zh-CN" altLang="en-US" dirty="0"/>
           </a:p>
           <a:p>
             <a:pPr lvl="2"/>
@@ -6080,6 +6106,7 @@
               <a:rPr lang="zh-CN" altLang="en-US" dirty="0"/>
               <a:t>第三级</a:t>
             </a:r>
+            <a:endParaRPr lang="zh-CN" altLang="en-US" dirty="0"/>
           </a:p>
           <a:p>
             <a:pPr lvl="3"/>
@@ -6087,6 +6114,7 @@
               <a:rPr lang="zh-CN" altLang="en-US" dirty="0"/>
               <a:t>第四级</a:t>
             </a:r>
+            <a:endParaRPr lang="zh-CN" altLang="en-US" dirty="0"/>
           </a:p>
           <a:p>
             <a:pPr lvl="4"/>
@@ -6094,6 +6122,7 @@
               <a:rPr lang="zh-CN" altLang="en-US" dirty="0"/>
               <a:t>第五级</a:t>
             </a:r>
+            <a:endParaRPr lang="zh-CN" altLang="en-US" dirty="0"/>
           </a:p>
         </p:txBody>
       </p:sp>
@@ -6190,6 +6219,7 @@
               <a:rPr lang="zh-CN" altLang="en-US" dirty="0"/>
               <a:t>单击此处编辑母版文本样式</a:t>
             </a:r>
+            <a:endParaRPr lang="zh-CN" altLang="en-US" dirty="0"/>
           </a:p>
           <a:p>
             <a:pPr lvl="1"/>
@@ -6197,6 +6227,7 @@
               <a:rPr lang="zh-CN" altLang="en-US" dirty="0"/>
               <a:t>第二级</a:t>
             </a:r>
+            <a:endParaRPr lang="zh-CN" altLang="en-US" dirty="0"/>
           </a:p>
           <a:p>
             <a:pPr lvl="2"/>
@@ -6204,6 +6235,7 @@
               <a:rPr lang="zh-CN" altLang="en-US" dirty="0"/>
               <a:t>第三级</a:t>
             </a:r>
+            <a:endParaRPr lang="zh-CN" altLang="en-US" dirty="0"/>
           </a:p>
           <a:p>
             <a:pPr lvl="3"/>
@@ -6211,6 +6243,7 @@
               <a:rPr lang="zh-CN" altLang="en-US" dirty="0"/>
               <a:t>第四级</a:t>
             </a:r>
+            <a:endParaRPr lang="zh-CN" altLang="en-US" dirty="0"/>
           </a:p>
           <a:p>
             <a:pPr lvl="4"/>
@@ -6218,6 +6251,7 @@
               <a:rPr lang="zh-CN" altLang="en-US" dirty="0"/>
               <a:t>第五级</a:t>
             </a:r>
+            <a:endParaRPr lang="zh-CN" altLang="en-US" dirty="0"/>
           </a:p>
         </p:txBody>
       </p:sp>
@@ -6238,7 +6272,6 @@
           <a:p>
             <a:fld id="{760FBDFE-C587-4B4C-A407-44438C67B59E}" type="datetimeFigureOut">
               <a:rPr lang="zh-CN" altLang="en-US" smtClean="0"/>
-              <a:t>2026/9/17</a:t>
             </a:fld>
             <a:endParaRPr lang="zh-CN" altLang="en-US"/>
           </a:p>
@@ -6280,7 +6313,6 @@
           <a:p>
             <a:fld id="{49AE70B2-8BF9-45C0-BB95-33D1B9D3A854}" type="slidenum">
               <a:rPr lang="zh-CN" altLang="en-US" smtClean="0"/>
-              <a:t>‹#›</a:t>
             </a:fld>
             <a:endParaRPr lang="zh-CN" altLang="en-US"/>
           </a:p>
@@ -6364,6 +6396,7 @@
               <a:rPr lang="zh-CN" altLang="en-US"/>
               <a:t>单击此处编辑母版标题样式</a:t>
             </a:r>
+            <a:endParaRPr lang="zh-CN" altLang="en-US"/>
           </a:p>
         </p:txBody>
       </p:sp>
@@ -6437,6 +6470,7 @@
               <a:rPr lang="zh-CN" altLang="en-US" dirty="0"/>
               <a:t>单击此处编辑母版文本样式</a:t>
             </a:r>
+            <a:endParaRPr lang="zh-CN" altLang="en-US" dirty="0"/>
           </a:p>
         </p:txBody>
       </p:sp>
@@ -6511,6 +6545,7 @@
               <a:rPr lang="zh-CN" altLang="en-US" dirty="0"/>
               <a:t>单击此处编辑母版文本样式</a:t>
             </a:r>
+            <a:endParaRPr lang="zh-CN" altLang="en-US" dirty="0"/>
           </a:p>
           <a:p>
             <a:pPr lvl="1"/>
@@ -6518,6 +6553,7 @@
               <a:rPr lang="zh-CN" altLang="en-US" dirty="0"/>
               <a:t>第二级</a:t>
             </a:r>
+            <a:endParaRPr lang="zh-CN" altLang="en-US" dirty="0"/>
           </a:p>
           <a:p>
             <a:pPr lvl="2"/>
@@ -6525,6 +6561,7 @@
               <a:rPr lang="zh-CN" altLang="en-US" dirty="0"/>
               <a:t>第三级</a:t>
             </a:r>
+            <a:endParaRPr lang="zh-CN" altLang="en-US" dirty="0"/>
           </a:p>
           <a:p>
             <a:pPr lvl="3"/>
@@ -6532,6 +6569,7 @@
               <a:rPr lang="zh-CN" altLang="en-US" dirty="0"/>
               <a:t>第四级</a:t>
             </a:r>
+            <a:endParaRPr lang="zh-CN" altLang="en-US" dirty="0"/>
           </a:p>
           <a:p>
             <a:pPr lvl="4"/>
@@ -6539,6 +6577,7 @@
               <a:rPr lang="zh-CN" altLang="en-US" dirty="0"/>
               <a:t>第五级</a:t>
             </a:r>
+            <a:endParaRPr lang="zh-CN" altLang="en-US" dirty="0"/>
           </a:p>
         </p:txBody>
       </p:sp>
@@ -6612,6 +6651,7 @@
               <a:rPr lang="zh-CN" altLang="en-US" dirty="0"/>
               <a:t>单击此处编辑母版文本样式</a:t>
             </a:r>
+            <a:endParaRPr lang="zh-CN" altLang="en-US" dirty="0"/>
           </a:p>
         </p:txBody>
       </p:sp>
@@ -6686,6 +6726,7 @@
               <a:rPr lang="zh-CN" altLang="en-US" dirty="0"/>
               <a:t>单击此处编辑母版文本样式</a:t>
             </a:r>
+            <a:endParaRPr lang="zh-CN" altLang="en-US" dirty="0"/>
           </a:p>
           <a:p>
             <a:pPr lvl="1"/>
@@ -6693,6 +6734,7 @@
               <a:rPr lang="zh-CN" altLang="en-US" dirty="0"/>
               <a:t>第二级</a:t>
             </a:r>
+            <a:endParaRPr lang="zh-CN" altLang="en-US" dirty="0"/>
           </a:p>
           <a:p>
             <a:pPr lvl="2"/>
@@ -6700,6 +6742,7 @@
               <a:rPr lang="zh-CN" altLang="en-US" dirty="0"/>
               <a:t>第三级</a:t>
             </a:r>
+            <a:endParaRPr lang="zh-CN" altLang="en-US" dirty="0"/>
           </a:p>
           <a:p>
             <a:pPr lvl="3"/>
@@ -6707,6 +6750,7 @@
               <a:rPr lang="zh-CN" altLang="en-US" dirty="0"/>
               <a:t>第四级</a:t>
             </a:r>
+            <a:endParaRPr lang="zh-CN" altLang="en-US" dirty="0"/>
           </a:p>
           <a:p>
             <a:pPr lvl="4"/>
@@ -6714,6 +6758,7 @@
               <a:rPr lang="zh-CN" altLang="en-US" dirty="0"/>
               <a:t>第五级</a:t>
             </a:r>
+            <a:endParaRPr lang="zh-CN" altLang="en-US" dirty="0"/>
           </a:p>
         </p:txBody>
       </p:sp>
@@ -6762,7 +6807,6 @@
             <a:pPr algn="ctr">
               <a:defRPr/>
             </a:pPr>
-            <a:endParaRPr/>
           </a:p>
         </p:txBody>
       </p:sp>
@@ -6811,7 +6855,6 @@
             <a:pPr algn="ctr">
               <a:defRPr/>
             </a:pPr>
-            <a:endParaRPr/>
           </a:p>
         </p:txBody>
       </p:sp>
@@ -6851,7 +6894,6 @@
             <a:pPr algn="ctr">
               <a:defRPr/>
             </a:pPr>
-            <a:endParaRPr/>
           </a:p>
         </p:txBody>
       </p:sp>
@@ -6891,7 +6933,6 @@
             <a:pPr algn="ctr">
               <a:defRPr/>
             </a:pPr>
-            <a:endParaRPr/>
           </a:p>
         </p:txBody>
       </p:sp>
@@ -6933,7 +6974,6 @@
             <a:pPr algn="ctr">
               <a:defRPr/>
             </a:pPr>
-            <a:endParaRPr/>
           </a:p>
         </p:txBody>
       </p:sp>
@@ -6975,7 +7015,6 @@
             <a:pPr algn="ctr">
               <a:defRPr/>
             </a:pPr>
-            <a:endParaRPr/>
           </a:p>
         </p:txBody>
       </p:sp>
@@ -7060,7 +7099,6 @@
             <a:pPr algn="ctr">
               <a:defRPr/>
             </a:pPr>
-            <a:endParaRPr/>
           </a:p>
         </p:txBody>
       </p:sp>
@@ -7090,7 +7128,6 @@
           <a:p>
             <a:fld id="{49AE70B2-8BF9-45C0-BB95-33D1B9D3A854}" type="slidenum">
               <a:rPr lang="zh-CN" altLang="en-US" smtClean="0"/>
-              <a:t>‹#›</a:t>
             </a:fld>
             <a:endParaRPr lang="en-US" altLang="zh-CN"/>
           </a:p>
@@ -7174,6 +7211,7 @@
               <a:rPr lang="zh-CN" altLang="en-US"/>
               <a:t>单击此处编辑母版标题样式</a:t>
             </a:r>
+            <a:endParaRPr lang="zh-CN" altLang="en-US"/>
           </a:p>
         </p:txBody>
       </p:sp>
@@ -7222,7 +7260,6 @@
             <a:pPr algn="ctr">
               <a:defRPr/>
             </a:pPr>
-            <a:endParaRPr/>
           </a:p>
         </p:txBody>
       </p:sp>
@@ -7271,7 +7308,6 @@
             <a:pPr algn="ctr">
               <a:defRPr/>
             </a:pPr>
-            <a:endParaRPr/>
           </a:p>
         </p:txBody>
       </p:sp>
@@ -7324,7 +7360,6 @@
             <a:pPr algn="ctr">
               <a:defRPr/>
             </a:pPr>
-            <a:endParaRPr/>
           </a:p>
         </p:txBody>
       </p:sp>
@@ -7354,7 +7389,6 @@
           <a:p>
             <a:fld id="{49AE70B2-8BF9-45C0-BB95-33D1B9D3A854}" type="slidenum">
               <a:rPr lang="zh-CN" altLang="en-US" smtClean="0"/>
-              <a:t>‹#›</a:t>
             </a:fld>
             <a:endParaRPr lang="en-US" altLang="zh-CN"/>
           </a:p>
@@ -7488,6 +7522,7 @@
               <a:rPr lang="zh-CN" altLang="en-US" dirty="0"/>
               <a:t>单击此处编辑母版标题样式</a:t>
             </a:r>
+            <a:endParaRPr lang="zh-CN" altLang="en-US" dirty="0"/>
           </a:p>
         </p:txBody>
       </p:sp>
@@ -7508,7 +7543,6 @@
           <a:p>
             <a:fld id="{760FBDFE-C587-4B4C-A407-44438C67B59E}" type="datetimeFigureOut">
               <a:rPr lang="zh-CN" altLang="en-US" smtClean="0"/>
-              <a:t>2026/9/17</a:t>
             </a:fld>
             <a:endParaRPr lang="zh-CN" altLang="en-US"/>
           </a:p>
@@ -7550,7 +7584,6 @@
           <a:p>
             <a:fld id="{49AE70B2-8BF9-45C0-BB95-33D1B9D3A854}" type="slidenum">
               <a:rPr lang="zh-CN" altLang="en-US" smtClean="0"/>
-              <a:t>‹#›</a:t>
             </a:fld>
             <a:endParaRPr lang="zh-CN" altLang="en-US"/>
           </a:p>
@@ -7628,7 +7661,6 @@
             <a:pPr algn="ctr">
               <a:defRPr/>
             </a:pPr>
-            <a:endParaRPr/>
           </a:p>
         </p:txBody>
       </p:sp>
@@ -7694,7 +7726,6 @@
             <a:pPr algn="ctr">
               <a:defRPr/>
             </a:pPr>
-            <a:endParaRPr/>
           </a:p>
         </p:txBody>
       </p:sp>
@@ -7756,7 +7787,6 @@
             <a:pPr algn="ctr">
               <a:defRPr/>
             </a:pPr>
-            <a:endParaRPr/>
           </a:p>
         </p:txBody>
       </p:sp>
@@ -7799,6 +7829,7 @@
               <a:rPr lang="zh-CN" altLang="en-US"/>
               <a:t>编号</a:t>
             </a:r>
+            <a:endParaRPr lang="zh-CN" altLang="en-US"/>
           </a:p>
         </p:txBody>
       </p:sp>
@@ -7921,6 +7952,7 @@
               <a:rPr lang="zh-CN" altLang="en-US" dirty="0"/>
               <a:t>单击此处编辑母版标题样式</a:t>
             </a:r>
+            <a:endParaRPr lang="zh-CN" altLang="en-US" dirty="0"/>
           </a:p>
         </p:txBody>
       </p:sp>
@@ -7954,6 +7986,7 @@
               <a:rPr lang="zh-CN" altLang="en-US" dirty="0"/>
               <a:t>单击此处编辑母版文本样式</a:t>
             </a:r>
+            <a:endParaRPr lang="zh-CN" altLang="en-US" dirty="0"/>
           </a:p>
           <a:p>
             <a:pPr lvl="1"/>
@@ -7961,6 +7994,7 @@
               <a:rPr lang="zh-CN" altLang="en-US" dirty="0"/>
               <a:t>第二级</a:t>
             </a:r>
+            <a:endParaRPr lang="zh-CN" altLang="en-US" dirty="0"/>
           </a:p>
           <a:p>
             <a:pPr lvl="2"/>
@@ -7968,6 +8002,7 @@
               <a:rPr lang="zh-CN" altLang="en-US" dirty="0"/>
               <a:t>第三级</a:t>
             </a:r>
+            <a:endParaRPr lang="zh-CN" altLang="en-US" dirty="0"/>
           </a:p>
           <a:p>
             <a:pPr lvl="3"/>
@@ -7975,6 +8010,7 @@
               <a:rPr lang="zh-CN" altLang="en-US" dirty="0"/>
               <a:t>第四级</a:t>
             </a:r>
+            <a:endParaRPr lang="zh-CN" altLang="en-US" dirty="0"/>
           </a:p>
           <a:p>
             <a:pPr lvl="4"/>
@@ -7982,6 +8018,7 @@
               <a:rPr lang="zh-CN" altLang="en-US" dirty="0"/>
               <a:t>第五级</a:t>
             </a:r>
+            <a:endParaRPr lang="zh-CN" altLang="en-US" dirty="0"/>
           </a:p>
         </p:txBody>
       </p:sp>
@@ -8022,7 +8059,6 @@
           <a:p>
             <a:fld id="{760FBDFE-C587-4B4C-A407-44438C67B59E}" type="datetimeFigureOut">
               <a:rPr lang="zh-CN" altLang="en-US" smtClean="0"/>
-              <a:t>2026/9/17</a:t>
             </a:fld>
             <a:endParaRPr lang="zh-CN" altLang="en-US"/>
           </a:p>
@@ -8104,7 +8140,6 @@
           <a:p>
             <a:fld id="{49AE70B2-8BF9-45C0-BB95-33D1B9D3A854}" type="slidenum">
               <a:rPr lang="zh-CN" altLang="en-US" smtClean="0"/>
-              <a:t>‹#›</a:t>
             </a:fld>
             <a:endParaRPr lang="zh-CN" altLang="en-US"/>
           </a:p>
@@ -8119,7 +8154,7 @@
           <p:nvPr userDrawn="1"/>
         </p:nvPicPr>
         <p:blipFill>
-          <a:blip r:embed="rId16"/>
+          <a:blip r:embed="rId15"/>
           <a:stretch>
             <a:fillRect/>
           </a:stretch>
@@ -8490,6 +8525,7 @@
               <a:rPr lang="zh-CN" altLang="en-US" sz="6000"/>
               <a:t>为什么表现不同</a:t>
             </a:r>
+            <a:endParaRPr lang="zh-CN" altLang="en-US" sz="6000"/>
           </a:p>
         </p:txBody>
       </p:sp>
@@ -8512,6 +8548,7 @@
               <a:rPr lang="zh-CN" altLang="en-US"/>
               <a:t>港科大人工智能前沿系列课程——大模型基础通识</a:t>
             </a:r>
+            <a:endParaRPr lang="zh-CN" altLang="en-US"/>
           </a:p>
           <a:p>
             <a:endParaRPr lang="zh-CN" altLang="en-US"/>
@@ -8537,6 +8574,7 @@
               <a:rPr lang="zh-CN" altLang="en-US"/>
               <a:t>授课人：王若愚</a:t>
             </a:r>
+            <a:endParaRPr lang="zh-CN" altLang="en-US"/>
           </a:p>
         </p:txBody>
       </p:sp>
@@ -8559,6 +8597,7 @@
               <a:rPr lang="en-US" altLang="zh-CN" dirty="0"/>
               <a:t>2026/09/01</a:t>
             </a:r>
+            <a:endParaRPr lang="en-US" altLang="zh-CN" dirty="0"/>
           </a:p>
         </p:txBody>
       </p:sp>
@@ -8629,6 +8668,7 @@
               <a:rPr lang="zh-CN" altLang="en-US"/>
               <a:t>机制</a:t>
             </a:r>
+            <a:endParaRPr lang="zh-CN" altLang="en-US"/>
           </a:p>
         </p:txBody>
       </p:sp>
@@ -8651,6 +8691,7 @@
               <a:rPr lang="zh-CN" altLang="en-US" dirty="0"/>
               <a:t>文本续写</a:t>
             </a:r>
+            <a:endParaRPr lang="zh-CN" altLang="en-US" dirty="0"/>
           </a:p>
           <a:p>
             <a:r>
@@ -8673,6 +8714,7 @@
               <a:rPr lang="zh-CN" altLang="en-US" dirty="0"/>
               <a:t>部分</a:t>
             </a:r>
+            <a:endParaRPr lang="zh-CN" altLang="en-US" dirty="0"/>
           </a:p>
           <a:p>
             <a:r>
@@ -8691,6 +8733,7 @@
               <a:rPr lang="en-US" altLang="zh-CN" dirty="0"/>
               <a:t> assistant</a:t>
             </a:r>
+            <a:endParaRPr lang="en-US" altLang="zh-CN" dirty="0"/>
           </a:p>
         </p:txBody>
       </p:sp>
@@ -8713,6 +8756,7 @@
               <a:rPr lang="zh-CN" altLang="en-US"/>
               <a:t>示例</a:t>
             </a:r>
+            <a:endParaRPr lang="zh-CN" altLang="en-US"/>
           </a:p>
         </p:txBody>
       </p:sp>
@@ -8811,6 +8855,9 @@
               </a:rPr>
               <a:t>&lt;/system&gt;</a:t>
             </a:r>
+            <a:endParaRPr lang="en-US" altLang="zh-CN" sz="1600">
+              <a:sym typeface="+mn-ea"/>
+            </a:endParaRPr>
           </a:p>
           <a:p>
             <a:pPr marL="0" algn="l" fontAlgn="auto">
@@ -8829,6 +8876,9 @@
               </a:rPr>
               <a:t>&lt;user&gt;</a:t>
             </a:r>
+            <a:endParaRPr lang="en-US" altLang="zh-CN" sz="1600">
+              <a:sym typeface="+mn-ea"/>
+            </a:endParaRPr>
           </a:p>
           <a:p>
             <a:pPr marL="0" algn="l" fontAlgn="auto">
@@ -8904,6 +8954,9 @@
               </a:rPr>
               <a:t>……</a:t>
             </a:r>
+            <a:endParaRPr lang="en-US" altLang="zh-CN" sz="1600">
+              <a:sym typeface="+mn-ea"/>
+            </a:endParaRPr>
           </a:p>
         </p:txBody>
       </p:sp>
@@ -8924,7 +8977,6 @@
           <a:p>
             <a:fld id="{49AE70B2-8BF9-45C0-BB95-33D1B9D3A854}" type="slidenum">
               <a:rPr lang="zh-CN" altLang="en-US" smtClean="0"/>
-              <a:t>10</a:t>
             </a:fld>
             <a:endParaRPr lang="en-US" altLang="zh-CN"/>
           </a:p>
@@ -9708,6 +9760,7 @@
               <a:rPr lang="zh-CN" altLang="en-US"/>
               <a:t>示例</a:t>
             </a:r>
+            <a:endParaRPr lang="zh-CN" altLang="en-US"/>
           </a:p>
         </p:txBody>
       </p:sp>
@@ -9772,6 +9825,9 @@
               </a:rPr>
               <a:t>。</a:t>
             </a:r>
+            <a:endParaRPr lang="en-US" altLang="zh-CN" dirty="0">
+              <a:sym typeface="+mn-ea"/>
+            </a:endParaRPr>
           </a:p>
           <a:p>
             <a:r>
@@ -9784,6 +9840,9 @@
               </a:rPr>
               <a:t>恒星为什么会发光？</a:t>
             </a:r>
+            <a:endParaRPr lang="zh-CN" altLang="en-US" dirty="0">
+              <a:sym typeface="+mn-ea"/>
+            </a:endParaRPr>
           </a:p>
           <a:p>
             <a:r>
@@ -9794,6 +9853,7 @@
               <a:rPr lang="zh-CN" altLang="en-US" dirty="0"/>
               <a:t>恒星发光是因为其核心持续发生核聚变，释放巨大能量并以光和热的形式辐射出来。</a:t>
             </a:r>
+            <a:endParaRPr lang="zh-CN" altLang="en-US" dirty="0"/>
           </a:p>
           <a:p>
             <a:r>
@@ -9806,12 +9866,14 @@
               <a:rPr lang="zh-CN" altLang="en-US" dirty="0"/>
               <a:t>：当恒星核心的核燃料耗尽后，它会发生什么？</a:t>
             </a:r>
+            <a:endParaRPr lang="zh-CN" altLang="en-US" dirty="0"/>
           </a:p>
           <a:p>
             <a:r>
               <a:rPr lang="en-US" altLang="zh-CN" dirty="0"/>
               <a:t>assistant: ……</a:t>
             </a:r>
+            <a:endParaRPr lang="en-US" altLang="zh-CN" dirty="0"/>
           </a:p>
         </p:txBody>
       </p:sp>
@@ -9832,7 +9894,6 @@
           <a:p>
             <a:fld id="{49AE70B2-8BF9-45C0-BB95-33D1B9D3A854}" type="slidenum">
               <a:rPr lang="zh-CN" altLang="en-US" smtClean="0"/>
-              <a:t>11</a:t>
             </a:fld>
             <a:endParaRPr lang="en-US" altLang="zh-CN"/>
           </a:p>
@@ -10217,6 +10278,7 @@
               <a:rPr lang="zh-CN" altLang="en-US"/>
               <a:t>影响训练的因素</a:t>
             </a:r>
+            <a:endParaRPr lang="zh-CN" altLang="en-US"/>
           </a:p>
         </p:txBody>
       </p:sp>
@@ -10237,7 +10299,6 @@
           <a:p>
             <a:fld id="{49AE70B2-8BF9-45C0-BB95-33D1B9D3A854}" type="slidenum">
               <a:rPr lang="zh-CN" altLang="en-US" smtClean="0"/>
-              <a:t>12</a:t>
             </a:fld>
             <a:endParaRPr lang="en-US" altLang="zh-CN"/>
           </a:p>
@@ -10448,6 +10509,7 @@
               <a:rPr lang="zh-CN" altLang="en-US" sz="1800"/>
               <a:t>训练数据时间边界：</a:t>
             </a:r>
+            <a:endParaRPr lang="zh-CN" altLang="en-US" sz="1800"/>
           </a:p>
           <a:p>
             <a:pPr lvl="1"/>
@@ -10455,12 +10517,14 @@
               <a:rPr lang="zh-CN" altLang="en-US" sz="1500"/>
               <a:t>新资讯、新知识</a:t>
             </a:r>
+            <a:endParaRPr lang="zh-CN" altLang="en-US" sz="1500"/>
           </a:p>
           <a:p>
             <a:r>
               <a:rPr lang="zh-CN" altLang="en-US" sz="1800"/>
               <a:t>数据质量：</a:t>
             </a:r>
+            <a:endParaRPr lang="zh-CN" altLang="en-US" sz="1800"/>
           </a:p>
           <a:p>
             <a:pPr lvl="1"/>
@@ -10468,12 +10532,14 @@
               <a:rPr lang="zh-CN" altLang="en-US" sz="1500"/>
               <a:t>错误、偏见</a:t>
             </a:r>
+            <a:endParaRPr lang="zh-CN" altLang="en-US" sz="1500"/>
           </a:p>
           <a:p>
             <a:r>
               <a:rPr lang="zh-CN" altLang="en-US" sz="1800"/>
               <a:t>领域覆盖：</a:t>
             </a:r>
+            <a:endParaRPr lang="zh-CN" altLang="en-US" sz="1800"/>
           </a:p>
           <a:p>
             <a:pPr lvl="1"/>
@@ -10481,6 +10547,7 @@
               <a:rPr lang="zh-CN" altLang="en-US" sz="1500"/>
               <a:t>专业任务训练少，表现弱</a:t>
             </a:r>
+            <a:endParaRPr lang="zh-CN" altLang="en-US" sz="1500"/>
           </a:p>
         </p:txBody>
       </p:sp>
@@ -10675,6 +10742,7 @@
               <a:rPr lang="zh-CN" altLang="en-US"/>
               <a:t>目标</a:t>
             </a:r>
+            <a:endParaRPr lang="zh-CN" altLang="en-US"/>
           </a:p>
         </p:txBody>
       </p:sp>
@@ -10873,6 +10941,11 @@
               </a:rPr>
               <a:t>数据</a:t>
             </a:r>
+            <a:endParaRPr lang="zh-CN" altLang="en-US">
+              <a:solidFill>
+                <a:srgbClr val="00E5FF"/>
+              </a:solidFill>
+            </a:endParaRPr>
           </a:p>
         </p:txBody>
       </p:sp>
@@ -11086,6 +11159,7 @@
               <a:rPr lang="zh-CN" altLang="en-US" sz="1800"/>
               <a:t>参数量：</a:t>
             </a:r>
+            <a:endParaRPr lang="zh-CN" altLang="en-US" sz="1800"/>
           </a:p>
           <a:p>
             <a:pPr lvl="1">
@@ -11097,6 +11171,7 @@
               <a:rPr lang="zh-CN" altLang="en-US" sz="1500"/>
               <a:t>参数更多，保存的信息越多</a:t>
             </a:r>
+            <a:endParaRPr lang="zh-CN" altLang="en-US" sz="1500"/>
           </a:p>
           <a:p>
             <a:pPr lvl="0">
@@ -11108,6 +11183,7 @@
               <a:rPr lang="zh-CN" altLang="en-US" sz="1800"/>
               <a:t>上下文长度：</a:t>
             </a:r>
+            <a:endParaRPr lang="zh-CN" altLang="en-US" sz="1800"/>
           </a:p>
           <a:p>
             <a:pPr lvl="1">
@@ -11119,6 +11195,7 @@
               <a:rPr lang="zh-CN" altLang="en-US" sz="1500"/>
               <a:t>上下文越长，越能处理复杂任务</a:t>
             </a:r>
+            <a:endParaRPr lang="zh-CN" altLang="en-US" sz="1500"/>
           </a:p>
           <a:p>
             <a:pPr lvl="0"/>
@@ -11336,6 +11413,7 @@
               <a:rPr lang="zh-CN" altLang="en-US" sz="1800"/>
               <a:t>训练任务：</a:t>
             </a:r>
+            <a:endParaRPr lang="zh-CN" altLang="en-US" sz="1800"/>
           </a:p>
           <a:p>
             <a:pPr lvl="1">
@@ -11347,6 +11425,7 @@
               <a:rPr lang="zh-CN" altLang="en-US" sz="1500"/>
               <a:t>直接影响模型偏好</a:t>
             </a:r>
+            <a:endParaRPr lang="zh-CN" altLang="en-US" sz="1500"/>
           </a:p>
           <a:p>
             <a:pPr>
@@ -11358,6 +11437,7 @@
               <a:rPr lang="zh-CN" altLang="en-US" sz="1800"/>
               <a:t>对齐环节：</a:t>
             </a:r>
+            <a:endParaRPr lang="zh-CN" altLang="en-US" sz="1800"/>
           </a:p>
           <a:p>
             <a:pPr lvl="1">
@@ -11369,6 +11449,7 @@
               <a:rPr lang="zh-CN" altLang="en-US" sz="1500"/>
               <a:t>影响模型的使用安全性</a:t>
             </a:r>
+            <a:endParaRPr lang="zh-CN" altLang="en-US" sz="1500"/>
           </a:p>
           <a:p>
             <a:pPr lvl="1">
@@ -11380,6 +11461,7 @@
               <a:rPr lang="zh-CN" altLang="en-US" sz="1500"/>
               <a:t>影响输出质量</a:t>
             </a:r>
+            <a:endParaRPr lang="zh-CN" altLang="en-US" sz="1500"/>
           </a:p>
         </p:txBody>
       </p:sp>
@@ -11578,6 +11660,11 @@
               </a:rPr>
               <a:t>模型</a:t>
             </a:r>
+            <a:endParaRPr lang="zh-CN" altLang="en-US">
+              <a:solidFill>
+                <a:srgbClr val="69F0AE"/>
+              </a:solidFill>
+            </a:endParaRPr>
           </a:p>
         </p:txBody>
       </p:sp>
@@ -11971,6 +12058,7 @@
               <a:rPr lang="zh-CN" altLang="en-US"/>
               <a:t>产品差异也是重要因素</a:t>
             </a:r>
+            <a:endParaRPr lang="zh-CN" altLang="en-US"/>
           </a:p>
         </p:txBody>
       </p:sp>
@@ -11997,6 +12085,11 @@
               </a:rPr>
               <a:t>工具能力</a:t>
             </a:r>
+            <a:endParaRPr lang="zh-CN" altLang="en-US">
+              <a:solidFill>
+                <a:schemeClr val="bg1"/>
+              </a:solidFill>
+            </a:endParaRPr>
           </a:p>
           <a:p>
             <a:pPr lvl="1"/>
@@ -12008,6 +12101,11 @@
               </a:rPr>
               <a:t>工具是否可以完成任务需求？</a:t>
             </a:r>
+            <a:endParaRPr lang="zh-CN" altLang="en-US">
+              <a:solidFill>
+                <a:schemeClr val="bg1"/>
+              </a:solidFill>
+            </a:endParaRPr>
           </a:p>
           <a:p>
             <a:pPr lvl="1"/>
@@ -12019,6 +12117,11 @@
               </a:rPr>
               <a:t>有需求的时候是否能够用到匹配的工具？</a:t>
             </a:r>
+            <a:endParaRPr lang="zh-CN" altLang="en-US">
+              <a:solidFill>
+                <a:schemeClr val="bg1"/>
+              </a:solidFill>
+            </a:endParaRPr>
           </a:p>
           <a:p>
             <a:r>
@@ -12029,6 +12132,11 @@
               </a:rPr>
               <a:t>工作流编排</a:t>
             </a:r>
+            <a:endParaRPr lang="zh-CN" altLang="en-US">
+              <a:solidFill>
+                <a:schemeClr val="bg1"/>
+              </a:solidFill>
+            </a:endParaRPr>
           </a:p>
           <a:p>
             <a:pPr lvl="1"/>
@@ -12040,6 +12148,11 @@
               </a:rPr>
               <a:t>是否进行质量检查？</a:t>
             </a:r>
+            <a:endParaRPr lang="zh-CN" altLang="en-US" sz="1800">
+              <a:solidFill>
+                <a:schemeClr val="bg1"/>
+              </a:solidFill>
+            </a:endParaRPr>
           </a:p>
           <a:p>
             <a:pPr lvl="1"/>
@@ -12066,6 +12179,11 @@
               </a:rPr>
               <a:t>用户交互</a:t>
             </a:r>
+            <a:endParaRPr lang="zh-CN" altLang="en-US">
+              <a:solidFill>
+                <a:schemeClr val="bg1"/>
+              </a:solidFill>
+            </a:endParaRPr>
           </a:p>
           <a:p>
             <a:pPr lvl="1"/>
@@ -12077,6 +12195,11 @@
               </a:rPr>
               <a:t>是否在需要用户决策的时候把决策权还给用户</a:t>
             </a:r>
+            <a:endParaRPr lang="zh-CN" altLang="en-US">
+              <a:solidFill>
+                <a:schemeClr val="bg1"/>
+              </a:solidFill>
+            </a:endParaRPr>
           </a:p>
         </p:txBody>
       </p:sp>
@@ -12097,7 +12220,6 @@
           <a:p>
             <a:fld id="{49AE70B2-8BF9-45C0-BB95-33D1B9D3A854}" type="slidenum">
               <a:rPr lang="zh-CN" altLang="en-US" smtClean="0"/>
-              <a:t>13</a:t>
             </a:fld>
             <a:endParaRPr lang="en-US" altLang="zh-CN"/>
           </a:p>
@@ -12634,6 +12756,7 @@
               <a:rPr lang="zh-CN" altLang="en-US"/>
               <a:t>）</a:t>
             </a:r>
+            <a:endParaRPr lang="zh-CN" altLang="en-US"/>
           </a:p>
         </p:txBody>
       </p:sp>
@@ -12656,12 +12779,14 @@
               <a:rPr lang="zh-CN" altLang="en-US"/>
               <a:t>这里所说的微调是专指基于已经完成后训练的模型进行的额外训练</a:t>
             </a:r>
+            <a:endParaRPr lang="zh-CN" altLang="en-US"/>
           </a:p>
           <a:p>
             <a:r>
               <a:rPr lang="zh-CN" altLang="en-US"/>
               <a:t>训练的数据是某一个特定领域的专门数据</a:t>
             </a:r>
+            <a:endParaRPr lang="zh-CN" altLang="en-US"/>
           </a:p>
           <a:p>
             <a:pPr lvl="1"/>
@@ -12669,6 +12794,7 @@
               <a:rPr lang="zh-CN" altLang="en-US"/>
               <a:t>如：金融、法律、医疗</a:t>
             </a:r>
+            <a:endParaRPr lang="zh-CN" altLang="en-US"/>
           </a:p>
           <a:p>
             <a:pPr lvl="0"/>
@@ -12676,6 +12802,7 @@
               <a:rPr lang="zh-CN" altLang="en-US"/>
               <a:t>通常在小模型上进行，作为专有业务的特定环节</a:t>
             </a:r>
+            <a:endParaRPr lang="zh-CN" altLang="en-US"/>
           </a:p>
           <a:p>
             <a:pPr lvl="1"/>
@@ -12683,6 +12810,7 @@
               <a:rPr lang="zh-CN" altLang="en-US"/>
               <a:t>如：提取病历中的症状并进行标准化</a:t>
             </a:r>
+            <a:endParaRPr lang="zh-CN" altLang="en-US"/>
           </a:p>
         </p:txBody>
       </p:sp>
@@ -12705,12 +12833,14 @@
               <a:rPr lang="zh-CN" altLang="en-US" dirty="0"/>
               <a:t>微调是用特定数据继续训练大模型，使其适配</a:t>
             </a:r>
+            <a:endParaRPr lang="zh-CN" altLang="en-US" dirty="0"/>
           </a:p>
           <a:p>
             <a:r>
               <a:rPr lang="zh-CN" altLang="en-US" dirty="0"/>
               <a:t>下游任务或领域，提升专业表现。</a:t>
             </a:r>
+            <a:endParaRPr lang="zh-CN" altLang="en-US" dirty="0"/>
           </a:p>
         </p:txBody>
       </p:sp>
@@ -12731,7 +12861,6 @@
           <a:p>
             <a:fld id="{49AE70B2-8BF9-45C0-BB95-33D1B9D3A854}" type="slidenum">
               <a:rPr lang="zh-CN" altLang="en-US" smtClean="0"/>
-              <a:t>14</a:t>
             </a:fld>
             <a:endParaRPr lang="en-US" altLang="zh-CN"/>
           </a:p>
@@ -13230,6 +13359,7 @@
               <a:rPr lang="zh-CN" altLang="en-US"/>
               <a:t>检索增强生成</a:t>
             </a:r>
+            <a:endParaRPr lang="zh-CN" altLang="en-US"/>
           </a:p>
         </p:txBody>
       </p:sp>
@@ -13252,6 +13382,7 @@
               <a:rPr lang="zh-CN" altLang="en-US"/>
               <a:t>微调</a:t>
             </a:r>
+            <a:endParaRPr lang="zh-CN" altLang="en-US"/>
           </a:p>
         </p:txBody>
       </p:sp>
@@ -13282,24 +13413,28 @@
               <a:rPr lang="zh-CN" altLang="en-US"/>
               <a:t>记住资料</a:t>
             </a:r>
+            <a:endParaRPr lang="zh-CN" altLang="en-US"/>
           </a:p>
           <a:p>
             <a:r>
               <a:rPr lang="zh-CN" altLang="en-US"/>
               <a:t>模型参数会被修改</a:t>
             </a:r>
+            <a:endParaRPr lang="zh-CN" altLang="en-US"/>
           </a:p>
           <a:p>
             <a:r>
               <a:rPr lang="zh-CN" altLang="en-US"/>
               <a:t>小模型也能“专精”</a:t>
             </a:r>
+            <a:endParaRPr lang="zh-CN" altLang="en-US"/>
           </a:p>
           <a:p>
             <a:r>
               <a:rPr lang="zh-CN" altLang="en-US"/>
               <a:t>训练成本高，通用性弱</a:t>
             </a:r>
+            <a:endParaRPr lang="zh-CN" altLang="en-US"/>
           </a:p>
         </p:txBody>
       </p:sp>
@@ -13322,6 +13457,7 @@
               <a:rPr altLang="zh-CN"/>
               <a:t>RAG</a:t>
             </a:r>
+            <a:endParaRPr altLang="zh-CN"/>
           </a:p>
         </p:txBody>
       </p:sp>
@@ -13344,18 +13480,21 @@
               <a:rPr lang="zh-CN" altLang="en-US"/>
               <a:t>当场根据资料回答问题</a:t>
             </a:r>
+            <a:endParaRPr lang="zh-CN" altLang="en-US"/>
           </a:p>
           <a:p>
             <a:r>
               <a:rPr lang="zh-CN" altLang="en-US"/>
               <a:t>模型参数不变</a:t>
             </a:r>
+            <a:endParaRPr lang="zh-CN" altLang="en-US"/>
           </a:p>
           <a:p>
             <a:r>
               <a:rPr lang="zh-CN" altLang="en-US"/>
               <a:t>不用训练，通用性强</a:t>
             </a:r>
+            <a:endParaRPr lang="zh-CN" altLang="en-US"/>
           </a:p>
           <a:p>
             <a:r>
@@ -13370,6 +13509,7 @@
               <a:rPr lang="zh-CN" altLang="en-US"/>
               <a:t>消耗多</a:t>
             </a:r>
+            <a:endParaRPr lang="zh-CN" altLang="en-US"/>
           </a:p>
         </p:txBody>
       </p:sp>
@@ -13390,7 +13530,6 @@
           <a:p>
             <a:fld id="{49AE70B2-8BF9-45C0-BB95-33D1B9D3A854}" type="slidenum">
               <a:rPr lang="zh-CN" altLang="en-US" smtClean="0"/>
-              <a:t>15</a:t>
             </a:fld>
             <a:endParaRPr lang="en-US" altLang="zh-CN"/>
           </a:p>
@@ -14056,6 +14195,7 @@
               <a:rPr lang="zh-CN" altLang="en-US"/>
               <a:t>总结</a:t>
             </a:r>
+            <a:endParaRPr lang="zh-CN" altLang="en-US"/>
           </a:p>
         </p:txBody>
       </p:sp>
@@ -14105,6 +14245,11 @@
               </a:rPr>
               <a:t>，使得在训练数据上的预测结果尽可能接近理想的预期结果</a:t>
             </a:r>
+            <a:endParaRPr lang="zh-CN" altLang="en-US" sz="2800" dirty="0">
+              <a:solidFill>
+                <a:schemeClr val="bg1"/>
+              </a:solidFill>
+            </a:endParaRPr>
           </a:p>
           <a:p>
             <a:r>
@@ -14163,6 +14308,11 @@
               </a:rPr>
               <a:t>三个阶段</a:t>
             </a:r>
+            <a:endParaRPr lang="zh-CN" altLang="en-US" sz="2800" dirty="0">
+              <a:solidFill>
+                <a:schemeClr val="bg1"/>
+              </a:solidFill>
+            </a:endParaRPr>
           </a:p>
           <a:p>
             <a:r>
@@ -14227,6 +14377,11 @@
               </a:rPr>
               <a:t>下一节课：</a:t>
             </a:r>
+            <a:endParaRPr lang="zh-CN" altLang="en-US" sz="2800" dirty="0">
+              <a:solidFill>
+                <a:schemeClr val="bg1"/>
+              </a:solidFill>
+            </a:endParaRPr>
           </a:p>
           <a:p>
             <a:pPr lvl="1"/>
@@ -14254,6 +14409,11 @@
               </a:rPr>
               <a:t>？</a:t>
             </a:r>
+            <a:endParaRPr lang="zh-CN" altLang="en-US" sz="2520" dirty="0">
+              <a:solidFill>
+                <a:schemeClr val="bg1"/>
+              </a:solidFill>
+            </a:endParaRPr>
           </a:p>
           <a:p>
             <a:pPr lvl="1"/>
@@ -14282,7 +14442,6 @@
           <a:p>
             <a:fld id="{49AE70B2-8BF9-45C0-BB95-33D1B9D3A854}" type="slidenum">
               <a:rPr lang="zh-CN" altLang="en-US" smtClean="0"/>
-              <a:t>16</a:t>
             </a:fld>
             <a:endParaRPr lang="en-US" altLang="zh-CN"/>
           </a:p>
@@ -14664,6 +14823,7 @@
               <a:rPr lang="zh-CN" altLang="en-US" sz="3200" dirty="0"/>
               <a:t>回顾</a:t>
             </a:r>
+            <a:endParaRPr lang="zh-CN" altLang="en-US" sz="3200" dirty="0"/>
           </a:p>
         </p:txBody>
       </p:sp>
@@ -14823,7 +14983,6 @@
           <a:p>
             <a:fld id="{49AE70B2-8BF9-45C0-BB95-33D1B9D3A854}" type="slidenum">
               <a:rPr lang="zh-CN" altLang="en-US" smtClean="0"/>
-              <a:t>2</a:t>
             </a:fld>
             <a:endParaRPr lang="en-US" altLang="zh-CN"/>
           </a:p>
@@ -14878,7 +15037,7 @@
             <p:nvPr/>
           </p:nvPicPr>
           <p:blipFill>
-            <a:blip r:embed="rId3"/>
+            <a:blip r:embed="rId1"/>
             <a:stretch>
               <a:fillRect/>
             </a:stretch>
@@ -15048,7 +15207,7 @@
               <p:nvPr/>
             </p:nvPicPr>
             <p:blipFill>
-              <a:blip r:embed="rId4"/>
+              <a:blip r:embed="rId2"/>
               <a:stretch>
                 <a:fillRect/>
               </a:stretch>
@@ -15419,6 +15578,12 @@
               </a:rPr>
               <a:t>，</a:t>
             </a:r>
+            <a:endParaRPr lang="zh-CN" altLang="en-US" dirty="0">
+              <a:solidFill>
+                <a:schemeClr val="bg1"/>
+              </a:solidFill>
+              <a:sym typeface="+mn-ea"/>
+            </a:endParaRPr>
           </a:p>
           <a:p>
             <a:r>
@@ -15430,6 +15595,12 @@
               </a:rPr>
               <a:t>它们的能力会有什么差异呢？</a:t>
             </a:r>
+            <a:endParaRPr lang="zh-CN" altLang="en-US" dirty="0">
+              <a:solidFill>
+                <a:schemeClr val="bg1"/>
+              </a:solidFill>
+              <a:sym typeface="+mn-ea"/>
+            </a:endParaRPr>
           </a:p>
         </p:txBody>
       </p:sp>
@@ -15471,7 +15642,6 @@
           <a:p>
             <a:fld id="{49AE70B2-8BF9-45C0-BB95-33D1B9D3A854}" type="slidenum">
               <a:rPr lang="zh-CN" altLang="en-US" smtClean="0"/>
-              <a:t>3</a:t>
             </a:fld>
             <a:endParaRPr lang="en-US" altLang="zh-CN"/>
           </a:p>
@@ -15523,6 +15693,7 @@
               <a:rPr lang="zh-CN" altLang="en-US" sz="3200" dirty="0"/>
               <a:t>课程路线图</a:t>
             </a:r>
+            <a:endParaRPr lang="zh-CN" altLang="en-US" sz="3200" dirty="0"/>
           </a:p>
         </p:txBody>
       </p:sp>
@@ -15543,7 +15714,6 @@
           <a:p>
             <a:fld id="{49AE70B2-8BF9-45C0-BB95-33D1B9D3A854}" type="slidenum">
               <a:rPr lang="zh-CN" altLang="en-US" smtClean="0"/>
-              <a:t>4</a:t>
             </a:fld>
             <a:endParaRPr lang="en-US" altLang="zh-CN"/>
           </a:p>
@@ -15609,6 +15779,15 @@
               </a:rPr>
               <a:t>大</a:t>
             </a:r>
+            <a:endParaRPr lang="zh-CN" altLang="en-US" sz="3200" b="1" i="0" u="none" strike="noStrike">
+              <a:solidFill>
+                <a:srgbClr val="FFFFFF"/>
+              </a:solidFill>
+              <a:latin typeface="Noto Sans SC" panose="020B0200000000000000" charset="-122"/>
+              <a:ea typeface="SimSun" pitchFamily="2" charset="-122"/>
+              <a:cs typeface="Noto Sans SC" panose="020B0200000000000000" charset="-122"/>
+              <a:sym typeface="Noto Sans SC" panose="020B0200000000000000" charset="-122"/>
+            </a:endParaRPr>
           </a:p>
           <a:p>
             <a:pPr marL="0" indent="0" algn="ctr">
@@ -15629,6 +15808,15 @@
               </a:rPr>
               <a:t>模</a:t>
             </a:r>
+            <a:endParaRPr lang="zh-CN" altLang="en-US" sz="3200" b="1" i="0" u="none" strike="noStrike">
+              <a:solidFill>
+                <a:srgbClr val="FFFFFF"/>
+              </a:solidFill>
+              <a:latin typeface="Noto Sans SC" panose="020B0200000000000000" charset="-122"/>
+              <a:ea typeface="SimSun" pitchFamily="2" charset="-122"/>
+              <a:cs typeface="Noto Sans SC" panose="020B0200000000000000" charset="-122"/>
+              <a:sym typeface="Noto Sans SC" panose="020B0200000000000000" charset="-122"/>
+            </a:endParaRPr>
           </a:p>
           <a:p>
             <a:pPr marL="0" indent="0" algn="ctr">
@@ -15649,6 +15837,15 @@
               </a:rPr>
               <a:t>型</a:t>
             </a:r>
+            <a:endParaRPr lang="zh-CN" altLang="en-US" sz="3200" b="1" i="0" u="none" strike="noStrike">
+              <a:solidFill>
+                <a:srgbClr val="FFFFFF"/>
+              </a:solidFill>
+              <a:latin typeface="Noto Sans SC" panose="020B0200000000000000" charset="-122"/>
+              <a:ea typeface="SimSun" pitchFamily="2" charset="-122"/>
+              <a:cs typeface="Noto Sans SC" panose="020B0200000000000000" charset="-122"/>
+              <a:sym typeface="Noto Sans SC" panose="020B0200000000000000" charset="-122"/>
+            </a:endParaRPr>
           </a:p>
           <a:p>
             <a:pPr marL="0" indent="0" algn="ctr">
@@ -15669,6 +15866,15 @@
               </a:rPr>
               <a:t>产</a:t>
             </a:r>
+            <a:endParaRPr lang="zh-CN" altLang="en-US" sz="3200" b="1" i="0" u="none" strike="noStrike">
+              <a:solidFill>
+                <a:srgbClr val="FFFFFF"/>
+              </a:solidFill>
+              <a:latin typeface="Noto Sans SC" panose="020B0200000000000000" charset="-122"/>
+              <a:ea typeface="SimSun" pitchFamily="2" charset="-122"/>
+              <a:cs typeface="Noto Sans SC" panose="020B0200000000000000" charset="-122"/>
+              <a:sym typeface="Noto Sans SC" panose="020B0200000000000000" charset="-122"/>
+            </a:endParaRPr>
           </a:p>
           <a:p>
             <a:pPr marL="0" indent="0" algn="ctr">
@@ -15689,271 +15895,15 @@
               </a:rPr>
               <a:t>品</a:t>
             </a:r>
-          </a:p>
-        </p:txBody>
-      </p:sp>
-      <p:sp>
-        <p:nvSpPr>
-          <p:cNvPr id="5" name="AutoShape 6"/>
-          <p:cNvSpPr/>
-          <p:nvPr/>
-        </p:nvSpPr>
-        <p:spPr>
-          <a:xfrm>
-            <a:off x="3395980" y="1753235"/>
-            <a:ext cx="899795" cy="1543050"/>
-          </a:xfrm>
-          <a:prstGeom prst="roundRect">
-            <a:avLst>
-              <a:gd name="adj" fmla="val 0"/>
-            </a:avLst>
-          </a:prstGeom>
-          <a:solidFill>
-            <a:srgbClr val="B388FF">
-              <a:alpha val="8000"/>
-            </a:srgbClr>
-          </a:solidFill>
-          <a:ln w="25400" cap="flat" cmpd="sng">
-            <a:solidFill>
-              <a:srgbClr val="B388FF">
-                <a:alpha val="100000"/>
-              </a:srgbClr>
-            </a:solidFill>
-            <a:prstDash val="solid"/>
-            <a:round/>
-          </a:ln>
-          <a:effectLst>
-            <a:outerShdw blurRad="152400" dir="2700000" algn="tl" rotWithShape="0">
-              <a:srgbClr val="06F0D2">
-                <a:alpha val="40000"/>
-              </a:srgbClr>
-            </a:outerShdw>
-          </a:effectLst>
-        </p:spPr>
-        <p:txBody>
-          <a:bodyPr vert="horz" wrap="square" lIns="0" tIns="0" rIns="0" bIns="0" rtlCol="0" anchor="ctr" anchorCtr="0"/>
-          <a:lstStyle/>
-          <a:p>
-            <a:pPr marL="0" indent="0" algn="ctr">
-              <a:lnSpc>
-                <a:spcPct val="125000"/>
-              </a:lnSpc>
-              <a:defRPr/>
-            </a:pPr>
-            <a:r>
-              <a:rPr lang="zh-CN" altLang="en-US" sz="2400" b="1" i="0" u="none" strike="noStrike">
-                <a:solidFill>
-                  <a:srgbClr val="FFFFFF"/>
-                </a:solidFill>
-                <a:latin typeface="Noto Sans SC" panose="020B0200000000000000" charset="-122"/>
-                <a:ea typeface="SimSun" pitchFamily="2" charset="-122"/>
-                <a:cs typeface="Noto Sans SC" panose="020B0200000000000000" charset="-122"/>
-                <a:sym typeface="Noto Sans SC" panose="020B0200000000000000" charset="-122"/>
-              </a:rPr>
-              <a:t>模型</a:t>
-            </a:r>
-          </a:p>
-          <a:p>
-            <a:pPr marL="0" indent="0" algn="ctr">
-              <a:lnSpc>
-                <a:spcPct val="125000"/>
-              </a:lnSpc>
-              <a:defRPr/>
-            </a:pPr>
-            <a:r>
-              <a:rPr lang="zh-CN" altLang="en-US" sz="2400" b="1" i="0" u="none" strike="noStrike">
-                <a:solidFill>
-                  <a:srgbClr val="FFFFFF"/>
-                </a:solidFill>
-                <a:latin typeface="Noto Sans SC" panose="020B0200000000000000" charset="-122"/>
-                <a:ea typeface="SimSun" pitchFamily="2" charset="-122"/>
-                <a:cs typeface="Noto Sans SC" panose="020B0200000000000000" charset="-122"/>
-                <a:sym typeface="Noto Sans SC" panose="020B0200000000000000" charset="-122"/>
-              </a:rPr>
-              <a:t>原理</a:t>
-            </a:r>
-          </a:p>
-        </p:txBody>
-      </p:sp>
-      <p:sp>
-        <p:nvSpPr>
-          <p:cNvPr id="7" name="AutoShape 6"/>
-          <p:cNvSpPr/>
-          <p:nvPr/>
-        </p:nvSpPr>
-        <p:spPr>
-          <a:xfrm>
-            <a:off x="3395980" y="3416935"/>
-            <a:ext cx="899795" cy="1547495"/>
-          </a:xfrm>
-          <a:prstGeom prst="roundRect">
-            <a:avLst>
-              <a:gd name="adj" fmla="val 0"/>
-            </a:avLst>
-          </a:prstGeom>
-          <a:solidFill>
-            <a:srgbClr val="B388FF">
-              <a:alpha val="8000"/>
-            </a:srgbClr>
-          </a:solidFill>
-          <a:ln w="25400" cap="flat" cmpd="sng">
-            <a:solidFill>
-              <a:srgbClr val="B388FF">
-                <a:alpha val="100000"/>
-              </a:srgbClr>
-            </a:solidFill>
-            <a:prstDash val="solid"/>
-            <a:round/>
-          </a:ln>
-          <a:effectLst>
-            <a:outerShdw blurRad="152400" dir="2700000" algn="tl" rotWithShape="0">
-              <a:srgbClr val="06F0D2">
-                <a:alpha val="40000"/>
-              </a:srgbClr>
-            </a:outerShdw>
-          </a:effectLst>
-        </p:spPr>
-        <p:txBody>
-          <a:bodyPr vert="horz" wrap="square" lIns="0" tIns="0" rIns="0" bIns="0" rtlCol="0" anchor="ctr" anchorCtr="0">
-            <a:noAutofit/>
-          </a:bodyPr>
-          <a:lstStyle/>
-          <a:p>
-            <a:pPr lvl="0" algn="ctr">
-              <a:lnSpc>
-                <a:spcPct val="125000"/>
-              </a:lnSpc>
-              <a:buClrTx/>
-              <a:buSzTx/>
-              <a:buFontTx/>
-              <a:defRPr/>
-            </a:pPr>
-            <a:r>
-              <a:rPr lang="zh-CN" altLang="en-US" sz="2400" b="1">
-                <a:solidFill>
-                  <a:srgbClr val="FFFFFF"/>
-                </a:solidFill>
-                <a:latin typeface="Noto Sans SC" panose="020B0200000000000000" charset="-122"/>
-                <a:ea typeface="SimSun" pitchFamily="2" charset="-122"/>
-                <a:cs typeface="Noto Sans SC" panose="020B0200000000000000" charset="-122"/>
-                <a:sym typeface="Noto Sans SC" panose="020B0200000000000000" charset="-122"/>
-              </a:rPr>
-              <a:t>模型</a:t>
-            </a:r>
-          </a:p>
-          <a:p>
-            <a:pPr lvl="0" algn="ctr">
-              <a:lnSpc>
-                <a:spcPct val="125000"/>
-              </a:lnSpc>
-              <a:buClrTx/>
-              <a:buSzTx/>
-              <a:buFontTx/>
-              <a:defRPr/>
-            </a:pPr>
-            <a:r>
-              <a:rPr lang="zh-CN" altLang="en-US" sz="2400" b="1">
-                <a:solidFill>
-                  <a:srgbClr val="FFFFFF"/>
-                </a:solidFill>
-                <a:latin typeface="Noto Sans SC" panose="020B0200000000000000" charset="-122"/>
-                <a:ea typeface="SimSun" pitchFamily="2" charset="-122"/>
-                <a:cs typeface="Noto Sans SC" panose="020B0200000000000000" charset="-122"/>
-                <a:sym typeface="Noto Sans SC" panose="020B0200000000000000" charset="-122"/>
-              </a:rPr>
-              <a:t>应用</a:t>
-            </a:r>
-          </a:p>
-        </p:txBody>
-      </p:sp>
-      <p:sp>
-        <p:nvSpPr>
-          <p:cNvPr id="8" name="AutoShape 6"/>
-          <p:cNvSpPr/>
-          <p:nvPr/>
-        </p:nvSpPr>
-        <p:spPr>
-          <a:xfrm>
-            <a:off x="3395980" y="5086985"/>
-            <a:ext cx="899795" cy="989330"/>
-          </a:xfrm>
-          <a:prstGeom prst="roundRect">
-            <a:avLst>
-              <a:gd name="adj" fmla="val 0"/>
-            </a:avLst>
-          </a:prstGeom>
-          <a:solidFill>
-            <a:srgbClr val="B388FF">
-              <a:alpha val="8000"/>
-            </a:srgbClr>
-          </a:solidFill>
-          <a:ln w="25400" cap="flat" cmpd="sng">
-            <a:solidFill>
-              <a:srgbClr val="B388FF">
-                <a:alpha val="100000"/>
-              </a:srgbClr>
-            </a:solidFill>
-            <a:prstDash val="solid"/>
-            <a:round/>
-          </a:ln>
-          <a:effectLst>
-            <a:outerShdw blurRad="152400" dir="2700000" algn="tl" rotWithShape="0">
-              <a:srgbClr val="06F0D2">
-                <a:alpha val="40000"/>
-              </a:srgbClr>
-            </a:outerShdw>
-          </a:effectLst>
-        </p:spPr>
-        <p:txBody>
-          <a:bodyPr vert="horz" wrap="square" lIns="0" tIns="0" rIns="0" bIns="0" rtlCol="0" anchor="ctr" anchorCtr="0">
-            <a:noAutofit/>
-          </a:bodyPr>
-          <a:lstStyle/>
-          <a:p>
-            <a:pPr lvl="0" algn="ctr">
-              <a:lnSpc>
-                <a:spcPct val="125000"/>
-              </a:lnSpc>
-              <a:buClrTx/>
-              <a:buSzTx/>
-              <a:buFontTx/>
-              <a:defRPr/>
-            </a:pPr>
-            <a:r>
-              <a:rPr lang="zh-CN" altLang="en-US" sz="2400" b="1">
-                <a:solidFill>
-                  <a:srgbClr val="FFFFFF"/>
-                </a:solidFill>
-                <a:latin typeface="Noto Sans SC" panose="020B0200000000000000" charset="-122"/>
-                <a:ea typeface="SimSun" pitchFamily="2" charset="-122"/>
-                <a:cs typeface="Noto Sans SC" panose="020B0200000000000000" charset="-122"/>
-                <a:sym typeface="Noto Sans SC" panose="020B0200000000000000" charset="-122"/>
-              </a:rPr>
-              <a:t>智</a:t>
-            </a:r>
-          </a:p>
-          <a:p>
-            <a:pPr lvl="0" algn="ctr">
-              <a:lnSpc>
-                <a:spcPct val="125000"/>
-              </a:lnSpc>
-              <a:buClrTx/>
-              <a:buSzTx/>
-              <a:buFontTx/>
-              <a:defRPr/>
-            </a:pPr>
-            <a:r>
-              <a:rPr lang="zh-CN" altLang="en-US" sz="2400" b="1">
-                <a:solidFill>
-                  <a:srgbClr val="FFFFFF"/>
-                </a:solidFill>
-                <a:latin typeface="Noto Sans SC" panose="020B0200000000000000" charset="-122"/>
-                <a:ea typeface="SimSun" pitchFamily="2" charset="-122"/>
-                <a:cs typeface="Noto Sans SC" panose="020B0200000000000000" charset="-122"/>
-                <a:sym typeface="Noto Sans SC" panose="020B0200000000000000" charset="-122"/>
-              </a:rPr>
-              <a:t>能体</a:t>
-            </a:r>
+            <a:endParaRPr lang="zh-CN" altLang="en-US" sz="3200" b="1" i="0" u="none" strike="noStrike">
+              <a:solidFill>
+                <a:srgbClr val="FFFFFF"/>
+              </a:solidFill>
+              <a:latin typeface="Noto Sans SC" panose="020B0200000000000000" charset="-122"/>
+              <a:ea typeface="SimSun" pitchFamily="2" charset="-122"/>
+              <a:cs typeface="Noto Sans SC" panose="020B0200000000000000" charset="-122"/>
+              <a:sym typeface="Noto Sans SC" panose="020B0200000000000000" charset="-122"/>
+            </a:endParaRPr>
           </a:p>
         </p:txBody>
       </p:sp>
@@ -16009,7 +15959,6 @@
               <a:pPr algn="ctr">
                 <a:defRPr/>
               </a:pPr>
-              <a:endParaRPr/>
             </a:p>
           </p:txBody>
         </p:sp>
@@ -16045,7 +15994,6 @@
               <a:pPr algn="ctr">
                 <a:defRPr/>
               </a:pPr>
-              <a:endParaRPr/>
             </a:p>
           </p:txBody>
         </p:sp>
@@ -16083,6 +16031,14 @@
                 </a:rPr>
                 <a:t>01</a:t>
               </a:r>
+              <a:endParaRPr lang="en-US" b="1" kern="0">
+                <a:solidFill>
+                  <a:srgbClr val="69F0AE"/>
+                </a:solidFill>
+                <a:latin typeface="Noto Sans SC" panose="020B0200000000000000" charset="-122"/>
+                <a:ea typeface="Noto Sans SC" panose="020B0200000000000000" charset="-122"/>
+                <a:cs typeface="Noto Sans SC" panose="020B0200000000000000" charset="-122"/>
+              </a:endParaRPr>
             </a:p>
           </p:txBody>
         </p:sp>
@@ -16118,8 +16074,16 @@
                   <a:ea typeface="Noto Sans SC" panose="020B0200000000000000" charset="-122"/>
                   <a:cs typeface="Noto Sans SC" panose="020B0200000000000000" charset="-122"/>
                 </a:rPr>
-                <a:t>模型定位和介绍</a:t>
+                <a:t>AI产品定位和介绍</a:t>
               </a:r>
+              <a:endParaRPr lang="zh-CN" altLang="en-US" b="1" kern="0">
+                <a:solidFill>
+                  <a:srgbClr val="69F0AE"/>
+                </a:solidFill>
+                <a:latin typeface="Noto Sans SC" panose="020B0200000000000000" charset="-122"/>
+                <a:ea typeface="Noto Sans SC" panose="020B0200000000000000" charset="-122"/>
+                <a:cs typeface="Noto Sans SC" panose="020B0200000000000000" charset="-122"/>
+              </a:endParaRPr>
             </a:p>
           </p:txBody>
         </p:sp>
@@ -16262,6 +16226,14 @@
                 </a:rPr>
                 <a:t>05</a:t>
               </a:r>
+              <a:endParaRPr lang="en-US" b="1" kern="0">
+                <a:solidFill>
+                  <a:srgbClr val="FFE3B1"/>
+                </a:solidFill>
+                <a:latin typeface="Noto Sans SC" panose="020B0200000000000000" charset="-122"/>
+                <a:ea typeface="Noto Sans SC" panose="020B0200000000000000" charset="-122"/>
+                <a:cs typeface="Noto Sans SC" panose="020B0200000000000000" charset="-122"/>
+              </a:endParaRPr>
             </a:p>
           </p:txBody>
         </p:sp>
@@ -16297,8 +16269,16 @@
                   <a:ea typeface="Noto Sans SC" panose="020B0200000000000000" charset="-122"/>
                   <a:cs typeface="Noto Sans SC" panose="020B0200000000000000" charset="-122"/>
                 </a:rPr>
-                <a:t>模型训练、选型与评估</a:t>
+                <a:t>大模型的训练、选型与评估</a:t>
               </a:r>
+              <a:endParaRPr lang="zh-CN" altLang="en-US" b="1" kern="0">
+                <a:solidFill>
+                  <a:srgbClr val="FFE3B1"/>
+                </a:solidFill>
+                <a:latin typeface="Noto Sans SC" panose="020B0200000000000000" charset="-122"/>
+                <a:ea typeface="Noto Sans SC" panose="020B0200000000000000" charset="-122"/>
+                <a:cs typeface="Noto Sans SC" panose="020B0200000000000000" charset="-122"/>
+              </a:endParaRPr>
             </a:p>
           </p:txBody>
         </p:sp>
@@ -16447,6 +16427,16 @@
                 </a:rPr>
                 <a:t>07</a:t>
               </a:r>
+              <a:endParaRPr lang="en-US" b="1" kern="0">
+                <a:solidFill>
+                  <a:schemeClr val="bg1">
+                    <a:lumMod val="50000"/>
+                  </a:schemeClr>
+                </a:solidFill>
+                <a:latin typeface="Noto Sans SC" panose="020B0200000000000000" charset="-122"/>
+                <a:ea typeface="Noto Sans SC" panose="020B0200000000000000" charset="-122"/>
+                <a:cs typeface="Noto Sans SC" panose="020B0200000000000000" charset="-122"/>
+              </a:endParaRPr>
             </a:p>
           </p:txBody>
         </p:sp>
@@ -16484,8 +16474,18 @@
                   <a:ea typeface="Noto Sans SC" panose="020B0200000000000000" charset="-122"/>
                   <a:cs typeface="Noto Sans SC" panose="020B0200000000000000" charset="-122"/>
                 </a:rPr>
-                <a:t>智能体框架与工具使用</a:t>
+                <a:t>大模型的思维提示、智能体与工具</a:t>
               </a:r>
+              <a:endParaRPr lang="zh-CN" altLang="en-US" b="1" kern="0">
+                <a:solidFill>
+                  <a:schemeClr val="bg1">
+                    <a:lumMod val="50000"/>
+                  </a:schemeClr>
+                </a:solidFill>
+                <a:latin typeface="Noto Sans SC" panose="020B0200000000000000" charset="-122"/>
+                <a:ea typeface="Noto Sans SC" panose="020B0200000000000000" charset="-122"/>
+                <a:cs typeface="Noto Sans SC" panose="020B0200000000000000" charset="-122"/>
+              </a:endParaRPr>
             </a:p>
           </p:txBody>
         </p:sp>
@@ -16542,7 +16542,6 @@
               <a:pPr algn="ctr">
                 <a:defRPr/>
               </a:pPr>
-              <a:endParaRPr/>
             </a:p>
           </p:txBody>
         </p:sp>
@@ -16578,7 +16577,6 @@
               <a:pPr algn="ctr">
                 <a:defRPr/>
               </a:pPr>
-              <a:endParaRPr/>
             </a:p>
           </p:txBody>
         </p:sp>
@@ -16616,6 +16614,14 @@
                 </a:rPr>
                 <a:t>02</a:t>
               </a:r>
+              <a:endParaRPr lang="en-US" b="1" kern="0">
+                <a:solidFill>
+                  <a:srgbClr val="69F0AE"/>
+                </a:solidFill>
+                <a:latin typeface="Noto Sans SC" panose="020B0200000000000000" charset="-122"/>
+                <a:ea typeface="Noto Sans SC" panose="020B0200000000000000" charset="-122"/>
+                <a:cs typeface="Noto Sans SC" panose="020B0200000000000000" charset="-122"/>
+              </a:endParaRPr>
             </a:p>
           </p:txBody>
         </p:sp>
@@ -16651,8 +16657,16 @@
                   <a:ea typeface="Noto Sans SC" panose="020B0200000000000000" charset="-122"/>
                   <a:cs typeface="Noto Sans SC" panose="020B0200000000000000" charset="-122"/>
                 </a:rPr>
-                <a:t>生成机制</a:t>
+                <a:t>大模型的生成机制</a:t>
               </a:r>
+              <a:endParaRPr lang="zh-CN" altLang="en-US" b="1" kern="0">
+                <a:solidFill>
+                  <a:srgbClr val="69F0AE"/>
+                </a:solidFill>
+                <a:latin typeface="Noto Sans SC" panose="020B0200000000000000" charset="-122"/>
+                <a:ea typeface="Noto Sans SC" panose="020B0200000000000000" charset="-122"/>
+                <a:cs typeface="Noto Sans SC" panose="020B0200000000000000" charset="-122"/>
+              </a:endParaRPr>
             </a:p>
           </p:txBody>
         </p:sp>
@@ -16709,7 +16723,6 @@
               <a:pPr algn="ctr">
                 <a:defRPr/>
               </a:pPr>
-              <a:endParaRPr/>
             </a:p>
           </p:txBody>
         </p:sp>
@@ -16745,7 +16758,6 @@
               <a:pPr algn="ctr">
                 <a:defRPr/>
               </a:pPr>
-              <a:endParaRPr/>
             </a:p>
           </p:txBody>
         </p:sp>
@@ -16783,6 +16795,14 @@
                 </a:rPr>
                 <a:t>03</a:t>
               </a:r>
+              <a:endParaRPr lang="en-US" b="1" kern="0">
+                <a:solidFill>
+                  <a:srgbClr val="69F0AE"/>
+                </a:solidFill>
+                <a:latin typeface="Noto Sans SC" panose="020B0200000000000000" charset="-122"/>
+                <a:ea typeface="Noto Sans SC" panose="020B0200000000000000" charset="-122"/>
+                <a:cs typeface="Noto Sans SC" panose="020B0200000000000000" charset="-122"/>
+              </a:endParaRPr>
             </a:p>
           </p:txBody>
         </p:sp>
@@ -16818,7 +16838,18 @@
                   <a:ea typeface="Noto Sans SC" panose="020B0200000000000000" charset="-122"/>
                   <a:cs typeface="Noto Sans SC" panose="020B0200000000000000" charset="-122"/>
                 </a:rPr>
-                <a:t>token </a:t>
+                <a:t>Token</a:t>
+              </a:r>
+              <a:r>
+                <a:rPr lang="zh-CN" altLang="en-US" b="1" kern="0">
+                  <a:solidFill>
+                    <a:srgbClr val="69F0AE"/>
+                  </a:solidFill>
+                  <a:latin typeface="Noto Sans SC" panose="020B0200000000000000" charset="-122"/>
+                  <a:ea typeface="Noto Sans SC" panose="020B0200000000000000" charset="-122"/>
+                  <a:cs typeface="Noto Sans SC" panose="020B0200000000000000" charset="-122"/>
+                </a:rPr>
+                <a:t>、</a:t>
               </a:r>
               <a:r>
                 <a:rPr lang="zh-CN" altLang="en-US" b="1" kern="0">
@@ -16829,7 +16860,7 @@
                   <a:ea typeface="SimSun" pitchFamily="2" charset="-122"/>
                   <a:cs typeface="Noto Sans SC" panose="020B0200000000000000" charset="-122"/>
                 </a:rPr>
-                <a:t>和</a:t>
+                <a:t>E</a:t>
               </a:r>
               <a:r>
                 <a:rPr lang="en-US" altLang="zh-CN" b="1" kern="0">
@@ -16840,7 +16871,7 @@
                   <a:ea typeface="SimSun" pitchFamily="2" charset="-122"/>
                   <a:cs typeface="Noto Sans SC" panose="020B0200000000000000" charset="-122"/>
                 </a:rPr>
-                <a:t> </a:t>
+                <a:t>m</a:t>
               </a:r>
               <a:r>
                 <a:rPr lang="en-US" altLang="zh-CN" b="1" kern="0">
@@ -16851,8 +16882,16 @@
                   <a:ea typeface="Noto Sans SC" panose="020B0200000000000000" charset="-122"/>
                   <a:cs typeface="Noto Sans SC" panose="020B0200000000000000" charset="-122"/>
                 </a:rPr>
-                <a:t>embedding</a:t>
+                <a:t>bedding 和 RAG</a:t>
               </a:r>
+              <a:endParaRPr lang="en-US" altLang="zh-CN" b="1" kern="0">
+                <a:solidFill>
+                  <a:srgbClr val="69F0AE"/>
+                </a:solidFill>
+                <a:latin typeface="Noto Sans SC" panose="020B0200000000000000" charset="-122"/>
+                <a:ea typeface="Noto Sans SC" panose="020B0200000000000000" charset="-122"/>
+                <a:cs typeface="Noto Sans SC" panose="020B0200000000000000" charset="-122"/>
+              </a:endParaRPr>
             </a:p>
           </p:txBody>
         </p:sp>
@@ -16995,6 +17034,14 @@
                 </a:rPr>
                 <a:t>04</a:t>
               </a:r>
+              <a:endParaRPr lang="en-US" b="1" kern="0">
+                <a:solidFill>
+                  <a:srgbClr val="69F0AE"/>
+                </a:solidFill>
+                <a:latin typeface="Noto Sans SC" panose="020B0200000000000000" charset="-122"/>
+                <a:ea typeface="Noto Sans SC" panose="020B0200000000000000" charset="-122"/>
+                <a:cs typeface="Noto Sans SC" panose="020B0200000000000000" charset="-122"/>
+              </a:endParaRPr>
             </a:p>
           </p:txBody>
         </p:sp>
@@ -17030,8 +17077,16 @@
                   <a:ea typeface="Noto Sans SC" panose="020B0200000000000000" charset="-122"/>
                   <a:cs typeface="Noto Sans SC" panose="020B0200000000000000" charset="-122"/>
                 </a:rPr>
-                <a:t>注意力、算力和模型大小</a:t>
+                <a:t>Transformer、注意力、算力与缓存机制</a:t>
               </a:r>
+              <a:endParaRPr lang="zh-CN" altLang="en-US" b="1" kern="0">
+                <a:solidFill>
+                  <a:srgbClr val="69F0AE"/>
+                </a:solidFill>
+                <a:latin typeface="Noto Sans SC" panose="020B0200000000000000" charset="-122"/>
+                <a:ea typeface="Noto Sans SC" panose="020B0200000000000000" charset="-122"/>
+                <a:cs typeface="Noto Sans SC" panose="020B0200000000000000" charset="-122"/>
+              </a:endParaRPr>
             </a:p>
           </p:txBody>
         </p:sp>
@@ -17180,6 +17235,16 @@
                 </a:rPr>
                 <a:t>06</a:t>
               </a:r>
+              <a:endParaRPr lang="en-US" b="1" kern="0">
+                <a:solidFill>
+                  <a:schemeClr val="bg1">
+                    <a:lumMod val="50000"/>
+                  </a:schemeClr>
+                </a:solidFill>
+                <a:latin typeface="Noto Sans SC" panose="020B0200000000000000" charset="-122"/>
+                <a:ea typeface="Noto Sans SC" panose="020B0200000000000000" charset="-122"/>
+                <a:cs typeface="Noto Sans SC" panose="020B0200000000000000" charset="-122"/>
+              </a:endParaRPr>
             </a:p>
           </p:txBody>
         </p:sp>
@@ -17217,8 +17282,18 @@
                   <a:ea typeface="Noto Sans SC" panose="020B0200000000000000" charset="-122"/>
                   <a:cs typeface="Noto Sans SC" panose="020B0200000000000000" charset="-122"/>
                 </a:rPr>
-                <a:t>提示词技术</a:t>
+                <a:t>提示词与提示词工程</a:t>
               </a:r>
+              <a:endParaRPr lang="zh-CN" altLang="en-US" b="1" kern="0">
+                <a:solidFill>
+                  <a:schemeClr val="bg1">
+                    <a:lumMod val="50000"/>
+                  </a:schemeClr>
+                </a:solidFill>
+                <a:latin typeface="Noto Sans SC" panose="020B0200000000000000" charset="-122"/>
+                <a:ea typeface="Noto Sans SC" panose="020B0200000000000000" charset="-122"/>
+                <a:cs typeface="Noto Sans SC" panose="020B0200000000000000" charset="-122"/>
+              </a:endParaRPr>
             </a:p>
           </p:txBody>
         </p:sp>
@@ -17367,6 +17442,16 @@
                 </a:rPr>
                 <a:t>08</a:t>
               </a:r>
+              <a:endParaRPr lang="en-US" b="1" kern="0">
+                <a:solidFill>
+                  <a:schemeClr val="bg1">
+                    <a:lumMod val="50000"/>
+                  </a:schemeClr>
+                </a:solidFill>
+                <a:latin typeface="Noto Sans SC" panose="020B0200000000000000" charset="-122"/>
+                <a:ea typeface="Noto Sans SC" panose="020B0200000000000000" charset="-122"/>
+                <a:cs typeface="Noto Sans SC" panose="020B0200000000000000" charset="-122"/>
+              </a:endParaRPr>
             </a:p>
           </p:txBody>
         </p:sp>
@@ -17404,12 +17489,264 @@
                   <a:ea typeface="Noto Sans SC" panose="020B0200000000000000" charset="-122"/>
                   <a:cs typeface="Noto Sans SC" panose="020B0200000000000000" charset="-122"/>
                 </a:rPr>
-                <a:t>智能体记忆与案例剖析</a:t>
+                <a:t>智能体记忆、技能与案例</a:t>
               </a:r>
+              <a:endParaRPr lang="zh-CN" altLang="en-US" b="1" kern="0">
+                <a:solidFill>
+                  <a:schemeClr val="bg1">
+                    <a:lumMod val="50000"/>
+                  </a:schemeClr>
+                </a:solidFill>
+                <a:latin typeface="Noto Sans SC" panose="020B0200000000000000" charset="-122"/>
+                <a:ea typeface="Noto Sans SC" panose="020B0200000000000000" charset="-122"/>
+                <a:cs typeface="Noto Sans SC" panose="020B0200000000000000" charset="-122"/>
+              </a:endParaRPr>
             </a:p>
           </p:txBody>
         </p:sp>
       </p:grpSp>
+      <p:sp>
+        <p:nvSpPr>
+          <p:cNvPr id="3" name="AutoShape 6"/>
+          <p:cNvSpPr/>
+          <p:nvPr/>
+        </p:nvSpPr>
+        <p:spPr>
+          <a:xfrm>
+            <a:off x="3395980" y="1753235"/>
+            <a:ext cx="899795" cy="2653665"/>
+          </a:xfrm>
+          <a:prstGeom prst="roundRect">
+            <a:avLst>
+              <a:gd name="adj" fmla="val 0"/>
+            </a:avLst>
+          </a:prstGeom>
+          <a:solidFill>
+            <a:srgbClr val="B388FF">
+              <a:alpha val="8000"/>
+            </a:srgbClr>
+          </a:solidFill>
+          <a:ln w="25400" cap="flat" cmpd="sng">
+            <a:solidFill>
+              <a:srgbClr val="B388FF">
+                <a:alpha val="100000"/>
+              </a:srgbClr>
+            </a:solidFill>
+            <a:prstDash val="solid"/>
+            <a:round/>
+          </a:ln>
+          <a:effectLst>
+            <a:outerShdw blurRad="152400" dir="2700000" algn="tl" rotWithShape="0">
+              <a:srgbClr val="06F0D2">
+                <a:alpha val="40000"/>
+              </a:srgbClr>
+            </a:outerShdw>
+          </a:effectLst>
+        </p:spPr>
+        <p:txBody>
+          <a:bodyPr vert="horz" wrap="square" lIns="0" tIns="0" rIns="0" bIns="0" rtlCol="0" anchor="ctr" anchorCtr="0"/>
+          <a:lstStyle/>
+          <a:p>
+            <a:pPr marL="0" indent="0" algn="ctr">
+              <a:lnSpc>
+                <a:spcPct val="125000"/>
+              </a:lnSpc>
+              <a:defRPr/>
+            </a:pPr>
+            <a:r>
+              <a:rPr lang="zh-CN" altLang="en-US" sz="2400" b="1" i="0" u="none" strike="noStrike">
+                <a:solidFill>
+                  <a:srgbClr val="FFFFFF"/>
+                </a:solidFill>
+                <a:latin typeface="Noto Sans SC"/>
+                <a:ea typeface="SimSun" charset="0"/>
+                <a:cs typeface="Noto Sans SC"/>
+                <a:sym typeface="Noto Sans SC"/>
+              </a:rPr>
+              <a:t>模型</a:t>
+            </a:r>
+            <a:endParaRPr lang="zh-CN" altLang="en-US" sz="2400" b="1" i="0" u="none" strike="noStrike">
+              <a:solidFill>
+                <a:srgbClr val="FFFFFF"/>
+              </a:solidFill>
+              <a:latin typeface="Noto Sans SC"/>
+              <a:ea typeface="SimSun" charset="0"/>
+              <a:cs typeface="Noto Sans SC"/>
+              <a:sym typeface="Noto Sans SC"/>
+            </a:endParaRPr>
+          </a:p>
+          <a:p>
+            <a:pPr marL="0" indent="0" algn="ctr">
+              <a:lnSpc>
+                <a:spcPct val="125000"/>
+              </a:lnSpc>
+              <a:defRPr/>
+            </a:pPr>
+            <a:r>
+              <a:rPr lang="zh-CN" altLang="en-US" sz="2400" b="1" i="0" u="none" strike="noStrike">
+                <a:solidFill>
+                  <a:srgbClr val="FFFFFF"/>
+                </a:solidFill>
+                <a:latin typeface="Noto Sans SC"/>
+                <a:ea typeface="SimSun" charset="0"/>
+                <a:cs typeface="Noto Sans SC"/>
+                <a:sym typeface="Noto Sans SC"/>
+              </a:rPr>
+              <a:t>原理</a:t>
+            </a:r>
+            <a:endParaRPr lang="zh-CN" altLang="en-US" sz="2400" b="1" i="0" u="none" strike="noStrike">
+              <a:solidFill>
+                <a:srgbClr val="FFFFFF"/>
+              </a:solidFill>
+              <a:latin typeface="Noto Sans SC"/>
+              <a:ea typeface="SimSun" charset="0"/>
+              <a:cs typeface="Noto Sans SC"/>
+              <a:sym typeface="Noto Sans SC"/>
+            </a:endParaRPr>
+          </a:p>
+        </p:txBody>
+      </p:sp>
+      <p:sp>
+        <p:nvSpPr>
+          <p:cNvPr id="9" name="AutoShape 6"/>
+          <p:cNvSpPr/>
+          <p:nvPr/>
+        </p:nvSpPr>
+        <p:spPr>
+          <a:xfrm>
+            <a:off x="3395980" y="4530725"/>
+            <a:ext cx="899795" cy="1545590"/>
+          </a:xfrm>
+          <a:prstGeom prst="roundRect">
+            <a:avLst>
+              <a:gd name="adj" fmla="val 0"/>
+            </a:avLst>
+          </a:prstGeom>
+          <a:solidFill>
+            <a:srgbClr val="B388FF">
+              <a:alpha val="8000"/>
+            </a:srgbClr>
+          </a:solidFill>
+          <a:ln w="25400" cap="flat" cmpd="sng">
+            <a:solidFill>
+              <a:srgbClr val="B388FF">
+                <a:alpha val="100000"/>
+              </a:srgbClr>
+            </a:solidFill>
+            <a:prstDash val="solid"/>
+            <a:round/>
+          </a:ln>
+          <a:effectLst>
+            <a:outerShdw blurRad="152400" dir="2700000" algn="tl" rotWithShape="0">
+              <a:srgbClr val="06F0D2">
+                <a:alpha val="40000"/>
+              </a:srgbClr>
+            </a:outerShdw>
+          </a:effectLst>
+        </p:spPr>
+        <p:txBody>
+          <a:bodyPr vert="horz" wrap="square" lIns="0" tIns="0" rIns="0" bIns="0" rtlCol="0" anchor="ctr" anchorCtr="0">
+            <a:noAutofit/>
+          </a:bodyPr>
+          <a:lstStyle/>
+          <a:p>
+            <a:pPr lvl="0" algn="ctr">
+              <a:lnSpc>
+                <a:spcPct val="100000"/>
+              </a:lnSpc>
+              <a:buClrTx/>
+              <a:buSzTx/>
+              <a:buFontTx/>
+              <a:defRPr/>
+            </a:pPr>
+            <a:r>
+              <a:rPr lang="zh-CN" altLang="en-US" sz="2400" b="1">
+                <a:solidFill>
+                  <a:srgbClr val="FFFFFF"/>
+                </a:solidFill>
+                <a:latin typeface="Noto Sans SC"/>
+                <a:ea typeface="SimSun" charset="0"/>
+                <a:cs typeface="Noto Sans SC"/>
+                <a:sym typeface="Noto Sans SC"/>
+              </a:rPr>
+              <a:t>应用</a:t>
+            </a:r>
+            <a:endParaRPr lang="zh-CN" altLang="en-US" sz="2400" b="1">
+              <a:solidFill>
+                <a:srgbClr val="FFFFFF"/>
+              </a:solidFill>
+              <a:latin typeface="Noto Sans SC"/>
+              <a:ea typeface="SimSun" charset="0"/>
+              <a:cs typeface="Noto Sans SC"/>
+              <a:sym typeface="Noto Sans SC"/>
+            </a:endParaRPr>
+          </a:p>
+          <a:p>
+            <a:pPr lvl="0" algn="ctr">
+              <a:lnSpc>
+                <a:spcPct val="100000"/>
+              </a:lnSpc>
+              <a:buClrTx/>
+              <a:buSzTx/>
+              <a:buFontTx/>
+              <a:defRPr/>
+            </a:pPr>
+            <a:r>
+              <a:rPr lang="zh-CN" altLang="en-US" sz="2400" b="1">
+                <a:solidFill>
+                  <a:srgbClr val="FFFFFF"/>
+                </a:solidFill>
+                <a:latin typeface="Noto Sans SC"/>
+                <a:ea typeface="SimSun" charset="0"/>
+                <a:cs typeface="Noto Sans SC"/>
+                <a:sym typeface="Noto Sans SC"/>
+              </a:rPr>
+              <a:t>与智</a:t>
+            </a:r>
+            <a:endParaRPr lang="zh-CN" altLang="en-US" sz="2400" b="1">
+              <a:solidFill>
+                <a:srgbClr val="FFFFFF"/>
+              </a:solidFill>
+              <a:latin typeface="Noto Sans SC"/>
+              <a:ea typeface="SimSun" charset="0"/>
+              <a:cs typeface="Noto Sans SC"/>
+              <a:sym typeface="Noto Sans SC"/>
+            </a:endParaRPr>
+          </a:p>
+          <a:p>
+            <a:pPr lvl="0" algn="ctr">
+              <a:lnSpc>
+                <a:spcPct val="100000"/>
+              </a:lnSpc>
+              <a:buClrTx/>
+              <a:buSzTx/>
+              <a:buFontTx/>
+              <a:defRPr/>
+            </a:pPr>
+            <a:r>
+              <a:rPr lang="zh-CN" altLang="en-US" sz="2400" b="1">
+                <a:solidFill>
+                  <a:srgbClr val="FFFFFF"/>
+                </a:solidFill>
+                <a:latin typeface="Noto Sans SC"/>
+                <a:ea typeface="SimSun" charset="0"/>
+                <a:cs typeface="Noto Sans SC"/>
+                <a:sym typeface="Noto Sans SC"/>
+              </a:rPr>
+              <a:t>能体</a:t>
+            </a:r>
+            <a:endParaRPr lang="zh-CN" altLang="en-US" sz="2400" b="1">
+              <a:solidFill>
+                <a:srgbClr val="FFFFFF"/>
+              </a:solidFill>
+              <a:latin typeface="Noto Sans SC"/>
+              <a:ea typeface="SimSun" charset="0"/>
+              <a:cs typeface="Noto Sans SC"/>
+              <a:sym typeface="Noto Sans SC"/>
+            </a:endParaRPr>
+          </a:p>
+        </p:txBody>
+      </p:sp>
     </p:spTree>
   </p:cSld>
   <p:clrMapOvr>
@@ -17475,7 +17812,7 @@
                                 </p:cTn>
                               </p:par>
                               <p:par>
-                                <p:cTn id="8" presetID="10" presetClass="entr" presetSubtype="0" fill="hold" grpId="0" nodeType="withEffect">
+                                <p:cTn id="8" presetID="10" presetClass="entr" presetSubtype="0" fill="hold" nodeType="withEffect">
                                   <p:stCondLst>
                                     <p:cond delay="0"/>
                                   </p:stCondLst>
@@ -17488,7 +17825,7 @@
                                           </p:stCondLst>
                                         </p:cTn>
                                         <p:tgtEl>
-                                          <p:spTgt spid="5"/>
+                                          <p:spTgt spid="17"/>
                                         </p:tgtEl>
                                         <p:attrNameLst>
                                           <p:attrName>style.visibility</p:attrName>
@@ -17502,7 +17839,7 @@
                                       <p:cBhvr>
                                         <p:cTn id="10" dur="500"/>
                                         <p:tgtEl>
-                                          <p:spTgt spid="5"/>
+                                          <p:spTgt spid="17"/>
                                         </p:tgtEl>
                                       </p:cBhvr>
                                     </p:animEffect>
@@ -17510,7 +17847,7 @@
                                 </p:cTn>
                               </p:par>
                               <p:par>
-                                <p:cTn id="11" presetID="10" presetClass="entr" presetSubtype="0" fill="hold" grpId="0" nodeType="withEffect">
+                                <p:cTn id="11" presetID="10" presetClass="entr" presetSubtype="0" fill="hold" nodeType="withEffect">
                                   <p:stCondLst>
                                     <p:cond delay="0"/>
                                   </p:stCondLst>
@@ -17523,7 +17860,7 @@
                                           </p:stCondLst>
                                         </p:cTn>
                                         <p:tgtEl>
-                                          <p:spTgt spid="7"/>
+                                          <p:spTgt spid="28"/>
                                         </p:tgtEl>
                                         <p:attrNameLst>
                                           <p:attrName>style.visibility</p:attrName>
@@ -17537,7 +17874,7 @@
                                       <p:cBhvr>
                                         <p:cTn id="13" dur="500"/>
                                         <p:tgtEl>
-                                          <p:spTgt spid="7"/>
+                                          <p:spTgt spid="28"/>
                                         </p:tgtEl>
                                       </p:cBhvr>
                                     </p:animEffect>
@@ -17545,7 +17882,7 @@
                                 </p:cTn>
                               </p:par>
                               <p:par>
-                                <p:cTn id="14" presetID="10" presetClass="entr" presetSubtype="0" fill="hold" grpId="0" nodeType="withEffect">
+                                <p:cTn id="14" presetID="10" presetClass="entr" presetSubtype="0" fill="hold" nodeType="withEffect">
                                   <p:stCondLst>
                                     <p:cond delay="0"/>
                                   </p:stCondLst>
@@ -17558,7 +17895,7 @@
                                           </p:stCondLst>
                                         </p:cTn>
                                         <p:tgtEl>
-                                          <p:spTgt spid="8"/>
+                                          <p:spTgt spid="33"/>
                                         </p:tgtEl>
                                         <p:attrNameLst>
                                           <p:attrName>style.visibility</p:attrName>
@@ -17572,7 +17909,7 @@
                                       <p:cBhvr>
                                         <p:cTn id="16" dur="500"/>
                                         <p:tgtEl>
-                                          <p:spTgt spid="8"/>
+                                          <p:spTgt spid="33"/>
                                         </p:tgtEl>
                                       </p:cBhvr>
                                     </p:animEffect>
@@ -17593,7 +17930,7 @@
                                           </p:stCondLst>
                                         </p:cTn>
                                         <p:tgtEl>
-                                          <p:spTgt spid="17"/>
+                                          <p:spTgt spid="38"/>
                                         </p:tgtEl>
                                         <p:attrNameLst>
                                           <p:attrName>style.visibility</p:attrName>
@@ -17607,7 +17944,7 @@
                                       <p:cBhvr>
                                         <p:cTn id="19" dur="500"/>
                                         <p:tgtEl>
-                                          <p:spTgt spid="17"/>
+                                          <p:spTgt spid="38"/>
                                         </p:tgtEl>
                                       </p:cBhvr>
                                     </p:animEffect>
@@ -17628,7 +17965,7 @@
                                           </p:stCondLst>
                                         </p:cTn>
                                         <p:tgtEl>
-                                          <p:spTgt spid="28"/>
+                                          <p:spTgt spid="18"/>
                                         </p:tgtEl>
                                         <p:attrNameLst>
                                           <p:attrName>style.visibility</p:attrName>
@@ -17642,7 +17979,7 @@
                                       <p:cBhvr>
                                         <p:cTn id="22" dur="500"/>
                                         <p:tgtEl>
-                                          <p:spTgt spid="28"/>
+                                          <p:spTgt spid="18"/>
                                         </p:tgtEl>
                                       </p:cBhvr>
                                     </p:animEffect>
@@ -17663,7 +18000,7 @@
                                           </p:stCondLst>
                                         </p:cTn>
                                         <p:tgtEl>
-                                          <p:spTgt spid="33"/>
+                                          <p:spTgt spid="43"/>
                                         </p:tgtEl>
                                         <p:attrNameLst>
                                           <p:attrName>style.visibility</p:attrName>
@@ -17677,7 +18014,7 @@
                                       <p:cBhvr>
                                         <p:cTn id="25" dur="500"/>
                                         <p:tgtEl>
-                                          <p:spTgt spid="33"/>
+                                          <p:spTgt spid="43"/>
                                         </p:tgtEl>
                                       </p:cBhvr>
                                     </p:animEffect>
@@ -17698,7 +18035,7 @@
                                           </p:stCondLst>
                                         </p:cTn>
                                         <p:tgtEl>
-                                          <p:spTgt spid="38"/>
+                                          <p:spTgt spid="23"/>
                                         </p:tgtEl>
                                         <p:attrNameLst>
                                           <p:attrName>style.visibility</p:attrName>
@@ -17712,7 +18049,7 @@
                                       <p:cBhvr>
                                         <p:cTn id="28" dur="500"/>
                                         <p:tgtEl>
-                                          <p:spTgt spid="38"/>
+                                          <p:spTgt spid="23"/>
                                         </p:tgtEl>
                                       </p:cBhvr>
                                     </p:animEffect>
@@ -17733,7 +18070,7 @@
                                           </p:stCondLst>
                                         </p:cTn>
                                         <p:tgtEl>
-                                          <p:spTgt spid="18"/>
+                                          <p:spTgt spid="48"/>
                                         </p:tgtEl>
                                         <p:attrNameLst>
                                           <p:attrName>style.visibility</p:attrName>
@@ -17747,7 +18084,7 @@
                                       <p:cBhvr>
                                         <p:cTn id="31" dur="500"/>
                                         <p:tgtEl>
-                                          <p:spTgt spid="18"/>
+                                          <p:spTgt spid="48"/>
                                         </p:tgtEl>
                                       </p:cBhvr>
                                     </p:animEffect>
@@ -17755,7 +18092,7 @@
                                 </p:cTn>
                               </p:par>
                               <p:par>
-                                <p:cTn id="32" presetID="10" presetClass="entr" presetSubtype="0" fill="hold" nodeType="withEffect">
+                                <p:cTn id="32" presetID="10" presetClass="entr" presetSubtype="0" fill="hold" grpId="0" nodeType="withEffect">
                                   <p:stCondLst>
                                     <p:cond delay="0"/>
                                   </p:stCondLst>
@@ -17768,7 +18105,7 @@
                                           </p:stCondLst>
                                         </p:cTn>
                                         <p:tgtEl>
-                                          <p:spTgt spid="43"/>
+                                          <p:spTgt spid="3"/>
                                         </p:tgtEl>
                                         <p:attrNameLst>
                                           <p:attrName>style.visibility</p:attrName>
@@ -17782,7 +18119,7 @@
                                       <p:cBhvr>
                                         <p:cTn id="34" dur="500"/>
                                         <p:tgtEl>
-                                          <p:spTgt spid="43"/>
+                                          <p:spTgt spid="3"/>
                                         </p:tgtEl>
                                       </p:cBhvr>
                                     </p:animEffect>
@@ -17790,7 +18127,7 @@
                                 </p:cTn>
                               </p:par>
                               <p:par>
-                                <p:cTn id="35" presetID="10" presetClass="entr" presetSubtype="0" fill="hold" nodeType="withEffect">
+                                <p:cTn id="35" presetID="10" presetClass="entr" presetSubtype="0" fill="hold" grpId="0" nodeType="withEffect">
                                   <p:stCondLst>
                                     <p:cond delay="0"/>
                                   </p:stCondLst>
@@ -17803,7 +18140,7 @@
                                           </p:stCondLst>
                                         </p:cTn>
                                         <p:tgtEl>
-                                          <p:spTgt spid="23"/>
+                                          <p:spTgt spid="9"/>
                                         </p:tgtEl>
                                         <p:attrNameLst>
                                           <p:attrName>style.visibility</p:attrName>
@@ -17817,42 +18154,7 @@
                                       <p:cBhvr>
                                         <p:cTn id="37" dur="500"/>
                                         <p:tgtEl>
-                                          <p:spTgt spid="23"/>
-                                        </p:tgtEl>
-                                      </p:cBhvr>
-                                    </p:animEffect>
-                                  </p:childTnLst>
-                                </p:cTn>
-                              </p:par>
-                              <p:par>
-                                <p:cTn id="38" presetID="10" presetClass="entr" presetSubtype="0" fill="hold" nodeType="withEffect">
-                                  <p:stCondLst>
-                                    <p:cond delay="0"/>
-                                  </p:stCondLst>
-                                  <p:childTnLst>
-                                    <p:set>
-                                      <p:cBhvr>
-                                        <p:cTn id="39" dur="1" fill="hold">
-                                          <p:stCondLst>
-                                            <p:cond delay="0"/>
-                                          </p:stCondLst>
-                                        </p:cTn>
-                                        <p:tgtEl>
-                                          <p:spTgt spid="48"/>
-                                        </p:tgtEl>
-                                        <p:attrNameLst>
-                                          <p:attrName>style.visibility</p:attrName>
-                                        </p:attrNameLst>
-                                      </p:cBhvr>
-                                      <p:to>
-                                        <p:strVal val="visible"/>
-                                      </p:to>
-                                    </p:set>
-                                    <p:animEffect transition="in" filter="fade">
-                                      <p:cBhvr>
-                                        <p:cTn id="40" dur="500"/>
-                                        <p:tgtEl>
-                                          <p:spTgt spid="48"/>
+                                          <p:spTgt spid="9"/>
                                         </p:tgtEl>
                                       </p:cBhvr>
                                     </p:animEffect>
@@ -17889,12 +18191,10 @@
     <p:bldLst>
       <p:bldP spid="6" grpId="0" bldLvl="0" animBg="1"/>
       <p:bldP spid="6" grpId="1" animBg="1"/>
-      <p:bldP spid="5" grpId="0" bldLvl="0" animBg="1"/>
-      <p:bldP spid="5" grpId="1" animBg="1"/>
-      <p:bldP spid="7" grpId="0" bldLvl="0" animBg="1"/>
-      <p:bldP spid="7" grpId="1" animBg="1"/>
-      <p:bldP spid="8" grpId="0" bldLvl="0" animBg="1"/>
-      <p:bldP spid="8" grpId="1" animBg="1"/>
+      <p:bldP spid="3" grpId="0" bldLvl="0" animBg="1"/>
+      <p:bldP spid="3" grpId="1" animBg="1"/>
+      <p:bldP spid="9" grpId="0" bldLvl="0" animBg="1"/>
+      <p:bldP spid="9" grpId="1" animBg="1"/>
     </p:bldLst>
   </p:timing>
 </p:sld>
@@ -17938,6 +18238,7 @@
               <a:rPr lang="zh-CN" altLang="en-US"/>
               <a:t>模型的能力差异</a:t>
             </a:r>
+            <a:endParaRPr lang="zh-CN" altLang="en-US"/>
           </a:p>
         </p:txBody>
       </p:sp>
@@ -17967,6 +18268,7 @@
               <a:rPr lang="zh-CN" altLang="en-US"/>
               <a:t>模型有其擅长的任务：</a:t>
             </a:r>
+            <a:endParaRPr lang="zh-CN" altLang="en-US"/>
           </a:p>
           <a:p>
             <a:pPr lvl="0"/>
@@ -17974,6 +18276,7 @@
               <a:rPr lang="zh-CN" altLang="en-US"/>
               <a:t>使用模型前，要先了解它的使用说明：</a:t>
             </a:r>
+            <a:endParaRPr lang="zh-CN" altLang="en-US"/>
           </a:p>
           <a:p>
             <a:pPr lvl="1"/>
@@ -17981,6 +18284,7 @@
               <a:rPr lang="zh-CN" altLang="en-US"/>
               <a:t>事实准确性：是否基于正确资料；</a:t>
             </a:r>
+            <a:endParaRPr lang="zh-CN" altLang="en-US"/>
           </a:p>
           <a:p>
             <a:pPr lvl="1"/>
@@ -17988,6 +18292,7 @@
               <a:rPr lang="zh-CN" altLang="en-US"/>
               <a:t>理解能力：是否抓住任务重点和限制；</a:t>
             </a:r>
+            <a:endParaRPr lang="zh-CN" altLang="en-US"/>
           </a:p>
           <a:p>
             <a:pPr lvl="1"/>
@@ -17995,6 +18300,7 @@
               <a:rPr lang="zh-CN" altLang="en-US"/>
               <a:t>推理能力：多步骤任务是否可靠；</a:t>
             </a:r>
+            <a:endParaRPr lang="zh-CN" altLang="en-US"/>
           </a:p>
           <a:p>
             <a:pPr lvl="1"/>
@@ -18002,6 +18308,7 @@
               <a:rPr lang="zh-CN" altLang="en-US"/>
               <a:t>格式遵守：是否按要求输出表格、清单或字段；</a:t>
             </a:r>
+            <a:endParaRPr lang="zh-CN" altLang="en-US"/>
           </a:p>
           <a:p>
             <a:pPr lvl="1"/>
@@ -18017,6 +18324,7 @@
               <a:rPr lang="zh-CN" altLang="en-US"/>
               <a:t>加入上下文或使用代码；</a:t>
             </a:r>
+            <a:endParaRPr lang="zh-CN" altLang="en-US"/>
           </a:p>
           <a:p>
             <a:pPr lvl="1"/>
@@ -18024,6 +18332,7 @@
               <a:rPr lang="zh-CN" altLang="en-US"/>
               <a:t>安全性：是否保护隐私、避免过度承诺；</a:t>
             </a:r>
+            <a:endParaRPr lang="zh-CN" altLang="en-US"/>
           </a:p>
           <a:p>
             <a:pPr lvl="1"/>
@@ -18031,6 +18340,7 @@
               <a:rPr lang="zh-CN" altLang="en-US"/>
               <a:t>速度和成本：是否适合高频使用。</a:t>
             </a:r>
+            <a:endParaRPr lang="zh-CN" altLang="en-US"/>
           </a:p>
         </p:txBody>
       </p:sp>
@@ -18051,7 +18361,6 @@
           <a:p>
             <a:fld id="{49AE70B2-8BF9-45C0-BB95-33D1B9D3A854}" type="slidenum">
               <a:rPr lang="zh-CN" altLang="en-US" smtClean="0"/>
-              <a:t>5</a:t>
             </a:fld>
             <a:endParaRPr lang="en-US" altLang="zh-CN"/>
           </a:p>
@@ -18074,20 +18383,8 @@
                 <a:tableStyleId>{5C22544A-7EE6-4342-B048-85BDC9FD1C3A}</a:tableStyleId>
               </a:tblPr>
               <a:tblGrid>
-                <a:gridCol w="1243330">
-                  <a:extLst>
-                    <a:ext uri="{9D8B030D-6E8A-4147-A177-3AD203B41FA5}">
-                      <a16:colId xmlns:a16="http://schemas.microsoft.com/office/drawing/2014/main" val="20000"/>
-                    </a:ext>
-                  </a:extLst>
-                </a:gridCol>
-                <a:gridCol w="2607310">
-                  <a:extLst>
-                    <a:ext uri="{9D8B030D-6E8A-4147-A177-3AD203B41FA5}">
-                      <a16:colId xmlns:a16="http://schemas.microsoft.com/office/drawing/2014/main" val="20001"/>
-                    </a:ext>
-                  </a:extLst>
-                </a:gridCol>
+                <a:gridCol w="1243330"/>
+                <a:gridCol w="2607310"/>
               </a:tblGrid>
               <a:tr h="861060">
                 <a:tc>
@@ -18106,6 +18403,11 @@
                         </a:rPr>
                         <a:t>长文本</a:t>
                       </a:r>
+                      <a:endParaRPr lang="zh-CN" altLang="en-US" b="1">
+                        <a:solidFill>
+                          <a:schemeClr val="bg1"/>
+                        </a:solidFill>
+                      </a:endParaRPr>
                     </a:p>
                     <a:p>
                       <a:pPr algn="ctr">
@@ -18119,6 +18421,11 @@
                         </a:rPr>
                         <a:t>写作</a:t>
                       </a:r>
+                      <a:endParaRPr lang="zh-CN" altLang="en-US" b="1">
+                        <a:solidFill>
+                          <a:schemeClr val="bg1"/>
+                        </a:solidFill>
+                      </a:endParaRPr>
                     </a:p>
                   </a:txBody>
                   <a:tcPr anchor="ctr">
@@ -18166,6 +18473,11 @@
                         </a:rPr>
                         <a:t>Kimi 2.6</a:t>
                       </a:r>
+                      <a:endParaRPr lang="en-US" altLang="zh-CN" sz="1600" b="0">
+                        <a:solidFill>
+                          <a:schemeClr val="bg1"/>
+                        </a:solidFill>
+                      </a:endParaRPr>
                     </a:p>
                     <a:p>
                       <a:pPr marL="285750" indent="-285750">
@@ -18180,6 +18492,11 @@
                         </a:rPr>
                         <a:t>Llama 4 Scout</a:t>
                       </a:r>
+                      <a:endParaRPr lang="en-US" altLang="zh-CN" sz="1600" b="0">
+                        <a:solidFill>
+                          <a:schemeClr val="bg1"/>
+                        </a:solidFill>
+                      </a:endParaRPr>
                     </a:p>
                   </a:txBody>
                   <a:tcPr anchor="ctr">
@@ -18210,11 +18527,6 @@
                     <a:noFill/>
                   </a:tcPr>
                 </a:tc>
-                <a:extLst>
-                  <a:ext uri="{0D108BD9-81ED-4DB2-BD59-A6C34878D82A}">
-                    <a16:rowId xmlns:a16="http://schemas.microsoft.com/office/drawing/2014/main" val="10000"/>
-                  </a:ext>
-                </a:extLst>
               </a:tr>
               <a:tr h="861060">
                 <a:tc>
@@ -18233,6 +18545,11 @@
                         </a:rPr>
                         <a:t>编程</a:t>
                       </a:r>
+                      <a:endParaRPr lang="zh-CN" altLang="en-US" b="1">
+                        <a:solidFill>
+                          <a:schemeClr val="bg1"/>
+                        </a:solidFill>
+                      </a:endParaRPr>
                     </a:p>
                   </a:txBody>
                   <a:tcPr anchor="ctr">
@@ -18280,6 +18597,11 @@
                         </a:rPr>
                         <a:t>GPT 5.6 Sol</a:t>
                       </a:r>
+                      <a:endParaRPr lang="en-US" altLang="zh-CN" sz="1600" b="0">
+                        <a:solidFill>
+                          <a:schemeClr val="bg1"/>
+                        </a:solidFill>
+                      </a:endParaRPr>
                     </a:p>
                     <a:p>
                       <a:pPr marL="285750" indent="-285750">
@@ -18294,6 +18616,11 @@
                         </a:rPr>
                         <a:t>Opus 4.7</a:t>
                       </a:r>
+                      <a:endParaRPr lang="en-US" altLang="zh-CN" sz="1600" b="0">
+                        <a:solidFill>
+                          <a:schemeClr val="bg1"/>
+                        </a:solidFill>
+                      </a:endParaRPr>
                     </a:p>
                     <a:p>
                       <a:pPr marL="285750" indent="-285750">
@@ -18308,6 +18635,11 @@
                         </a:rPr>
                         <a:t>Minimax M3</a:t>
                       </a:r>
+                      <a:endParaRPr lang="en-US" altLang="zh-CN" sz="1600" b="0">
+                        <a:solidFill>
+                          <a:schemeClr val="bg1"/>
+                        </a:solidFill>
+                      </a:endParaRPr>
                     </a:p>
                   </a:txBody>
                   <a:tcPr anchor="ctr">
@@ -18338,11 +18670,6 @@
                     <a:noFill/>
                   </a:tcPr>
                 </a:tc>
-                <a:extLst>
-                  <a:ext uri="{0D108BD9-81ED-4DB2-BD59-A6C34878D82A}">
-                    <a16:rowId xmlns:a16="http://schemas.microsoft.com/office/drawing/2014/main" val="10001"/>
-                  </a:ext>
-                </a:extLst>
               </a:tr>
               <a:tr h="861060">
                 <a:tc>
@@ -18361,6 +18688,11 @@
                         </a:rPr>
                         <a:t>数学推理</a:t>
                       </a:r>
+                      <a:endParaRPr lang="zh-CN" altLang="en-US" b="1">
+                        <a:solidFill>
+                          <a:schemeClr val="bg1"/>
+                        </a:solidFill>
+                      </a:endParaRPr>
                     </a:p>
                   </a:txBody>
                   <a:tcPr anchor="ctr">
@@ -18408,6 +18740,11 @@
                         </a:rPr>
                         <a:t>Fable 5</a:t>
                       </a:r>
+                      <a:endParaRPr lang="en-US" altLang="zh-CN" sz="1600" b="0">
+                        <a:solidFill>
+                          <a:schemeClr val="bg1"/>
+                        </a:solidFill>
+                      </a:endParaRPr>
                     </a:p>
                     <a:p>
                       <a:pPr marL="285750" indent="-285750">
@@ -18422,6 +18759,11 @@
                         </a:rPr>
                         <a:t>DeepSeek V4 Pro</a:t>
                       </a:r>
+                      <a:endParaRPr lang="en-US" altLang="zh-CN" sz="1600" b="0">
+                        <a:solidFill>
+                          <a:schemeClr val="bg1"/>
+                        </a:solidFill>
+                      </a:endParaRPr>
                     </a:p>
                   </a:txBody>
                   <a:tcPr anchor="ctr">
@@ -18452,11 +18794,6 @@
                     <a:noFill/>
                   </a:tcPr>
                 </a:tc>
-                <a:extLst>
-                  <a:ext uri="{0D108BD9-81ED-4DB2-BD59-A6C34878D82A}">
-                    <a16:rowId xmlns:a16="http://schemas.microsoft.com/office/drawing/2014/main" val="10002"/>
-                  </a:ext>
-                </a:extLst>
               </a:tr>
               <a:tr h="861060">
                 <a:tc>
@@ -18475,6 +18812,11 @@
                         </a:rPr>
                         <a:t>视觉理解</a:t>
                       </a:r>
+                      <a:endParaRPr lang="zh-CN" altLang="en-US" b="1">
+                        <a:solidFill>
+                          <a:schemeClr val="bg1"/>
+                        </a:solidFill>
+                      </a:endParaRPr>
                     </a:p>
                   </a:txBody>
                   <a:tcPr anchor="ctr">
@@ -18522,6 +18864,11 @@
                         </a:rPr>
                         <a:t>Gemini 3.1</a:t>
                       </a:r>
+                      <a:endParaRPr lang="en-US" altLang="zh-CN" sz="1600" b="0">
+                        <a:solidFill>
+                          <a:schemeClr val="bg1"/>
+                        </a:solidFill>
+                      </a:endParaRPr>
                     </a:p>
                     <a:p>
                       <a:pPr marL="285750" indent="-285750">
@@ -18536,6 +18883,11 @@
                         </a:rPr>
                         <a:t>Qwen 3.8 max</a:t>
                       </a:r>
+                      <a:endParaRPr lang="en-US" altLang="zh-CN" sz="1600" b="0">
+                        <a:solidFill>
+                          <a:schemeClr val="bg1"/>
+                        </a:solidFill>
+                      </a:endParaRPr>
                     </a:p>
                   </a:txBody>
                   <a:tcPr anchor="ctr">
@@ -18566,11 +18918,6 @@
                     <a:noFill/>
                   </a:tcPr>
                 </a:tc>
-                <a:extLst>
-                  <a:ext uri="{0D108BD9-81ED-4DB2-BD59-A6C34878D82A}">
-                    <a16:rowId xmlns:a16="http://schemas.microsoft.com/office/drawing/2014/main" val="10003"/>
-                  </a:ext>
-                </a:extLst>
               </a:tr>
             </a:tbl>
           </a:graphicData>
@@ -19258,6 +19605,7 @@
               <a:rPr lang="zh-CN" altLang="en-US"/>
               <a:t>模型的训练过程</a:t>
             </a:r>
+            <a:endParaRPr lang="zh-CN" altLang="en-US"/>
           </a:p>
         </p:txBody>
       </p:sp>
@@ -19286,6 +19634,7 @@
               <a:rPr lang="zh-CN" altLang="en-US"/>
               <a:t>人类的学习过程</a:t>
             </a:r>
+            <a:endParaRPr lang="zh-CN" altLang="en-US"/>
           </a:p>
         </p:txBody>
       </p:sp>
@@ -19314,6 +19663,7 @@
               <a:rPr lang="zh-CN" altLang="en-US"/>
               <a:t>模型的训练过程</a:t>
             </a:r>
+            <a:endParaRPr lang="zh-CN" altLang="en-US"/>
           </a:p>
         </p:txBody>
       </p:sp>
@@ -19334,7 +19684,6 @@
           <a:p>
             <a:fld id="{49AE70B2-8BF9-45C0-BB95-33D1B9D3A854}" type="slidenum">
               <a:rPr lang="zh-CN" altLang="en-US" smtClean="0"/>
-              <a:t>6</a:t>
             </a:fld>
             <a:endParaRPr lang="en-US" altLang="zh-CN"/>
           </a:p>
@@ -19424,6 +19773,15 @@
               </a:rPr>
               <a:t>作业</a:t>
             </a:r>
+            <a:endParaRPr lang="zh-CN" altLang="en-US" i="0" u="none" strike="noStrike">
+              <a:solidFill>
+                <a:srgbClr val="FFFFFF"/>
+              </a:solidFill>
+              <a:latin typeface="Noto Sans SC" panose="020B0200000000000000" charset="-122"/>
+              <a:ea typeface="SimSun" pitchFamily="2" charset="-122"/>
+              <a:cs typeface="Noto Sans SC" panose="020B0200000000000000" charset="-122"/>
+              <a:sym typeface="Noto Sans SC" panose="020B0200000000000000" charset="-122"/>
+            </a:endParaRPr>
           </a:p>
         </p:txBody>
       </p:sp>
@@ -19487,6 +19845,15 @@
               </a:rPr>
               <a:t>完成的作业</a:t>
             </a:r>
+            <a:endParaRPr lang="zh-CN" altLang="en-US" i="0" u="none" strike="noStrike">
+              <a:solidFill>
+                <a:srgbClr val="FFFFFF"/>
+              </a:solidFill>
+              <a:latin typeface="Noto Sans SC" panose="020B0200000000000000" charset="-122"/>
+              <a:ea typeface="SimSun" pitchFamily="2" charset="-122"/>
+              <a:cs typeface="Noto Sans SC" panose="020B0200000000000000" charset="-122"/>
+              <a:sym typeface="Noto Sans SC" panose="020B0200000000000000" charset="-122"/>
+            </a:endParaRPr>
           </a:p>
         </p:txBody>
       </p:sp>
@@ -19550,6 +19917,15 @@
               </a:rPr>
               <a:t>毕业</a:t>
             </a:r>
+            <a:endParaRPr lang="zh-CN" altLang="en-US" i="0" u="none" strike="noStrike">
+              <a:solidFill>
+                <a:schemeClr val="bg1"/>
+              </a:solidFill>
+              <a:latin typeface="Noto Sans SC" panose="020B0200000000000000" charset="-122"/>
+              <a:ea typeface="SimSun" pitchFamily="2" charset="-122"/>
+              <a:cs typeface="Noto Sans SC" panose="020B0200000000000000" charset="-122"/>
+              <a:sym typeface="+mn-ea"/>
+            </a:endParaRPr>
           </a:p>
         </p:txBody>
       </p:sp>
@@ -19613,6 +19989,15 @@
               </a:rPr>
               <a:t>错题</a:t>
             </a:r>
+            <a:endParaRPr lang="zh-CN" i="0" u="none" strike="noStrike">
+              <a:solidFill>
+                <a:srgbClr val="FFFFFF"/>
+              </a:solidFill>
+              <a:latin typeface="Noto Sans SC" panose="020B0200000000000000" charset="-122"/>
+              <a:ea typeface="SimSun" pitchFamily="2" charset="-122"/>
+              <a:cs typeface="Noto Sans SC" panose="020B0200000000000000" charset="-122"/>
+              <a:sym typeface="Noto Sans SC" panose="020B0200000000000000" charset="-122"/>
+            </a:endParaRPr>
           </a:p>
         </p:txBody>
       </p:sp>
@@ -19702,6 +20087,11 @@
                 </a:rPr>
                 <a:t>批</a:t>
               </a:r>
+              <a:endParaRPr lang="zh-CN" sz="1600">
+                <a:solidFill>
+                  <a:srgbClr val="B388FF"/>
+                </a:solidFill>
+              </a:endParaRPr>
             </a:p>
             <a:p>
               <a:pPr algn="ctr">
@@ -19717,6 +20107,11 @@
                 </a:rPr>
                 <a:t>改</a:t>
               </a:r>
+              <a:endParaRPr lang="zh-CN" sz="1600">
+                <a:solidFill>
+                  <a:srgbClr val="B388FF"/>
+                </a:solidFill>
+              </a:endParaRPr>
             </a:p>
             <a:p>
               <a:pPr algn="ctr">
@@ -19732,6 +20127,11 @@
                 </a:rPr>
                 <a:t>作</a:t>
               </a:r>
+              <a:endParaRPr lang="zh-CN" sz="1600">
+                <a:solidFill>
+                  <a:srgbClr val="B388FF"/>
+                </a:solidFill>
+              </a:endParaRPr>
             </a:p>
             <a:p>
               <a:pPr algn="ctr">
@@ -19747,6 +20147,11 @@
                 </a:rPr>
                 <a:t>业</a:t>
               </a:r>
+              <a:endParaRPr lang="zh-CN" sz="1600">
+                <a:solidFill>
+                  <a:srgbClr val="B388FF"/>
+                </a:solidFill>
+              </a:endParaRPr>
             </a:p>
           </p:txBody>
         </p:sp>
@@ -19800,6 +20205,11 @@
                 </a:rPr>
                 <a:t>根据知识</a:t>
               </a:r>
+              <a:endParaRPr lang="zh-CN" sz="1600">
+                <a:solidFill>
+                  <a:srgbClr val="00E5FF"/>
+                </a:solidFill>
+              </a:endParaRPr>
             </a:p>
             <a:p>
               <a:pPr algn="ctr">
@@ -19815,6 +20225,11 @@
                 </a:rPr>
                 <a:t>回答问题</a:t>
               </a:r>
+              <a:endParaRPr lang="zh-CN" sz="1600">
+                <a:solidFill>
+                  <a:srgbClr val="00E5FF"/>
+                </a:solidFill>
+              </a:endParaRPr>
             </a:p>
           </p:txBody>
         </p:sp>
@@ -19905,6 +20320,11 @@
                 </a:rPr>
                 <a:t>调整知识</a:t>
               </a:r>
+              <a:endParaRPr lang="zh-CN" sz="1600">
+                <a:solidFill>
+                  <a:srgbClr val="FFE3B1"/>
+                </a:solidFill>
+              </a:endParaRPr>
             </a:p>
             <a:p>
               <a:pPr algn="ctr">
@@ -19920,6 +20340,11 @@
                 </a:rPr>
                 <a:t>体系</a:t>
               </a:r>
+              <a:endParaRPr lang="zh-CN" sz="1600">
+                <a:solidFill>
+                  <a:srgbClr val="FFE3B1"/>
+                </a:solidFill>
+              </a:endParaRPr>
             </a:p>
           </p:txBody>
         </p:sp>
@@ -20045,6 +20470,15 @@
               </a:rPr>
               <a:t>目标</a:t>
             </a:r>
+            <a:endParaRPr lang="zh-CN" altLang="en-US" i="0" u="none" strike="noStrike">
+              <a:solidFill>
+                <a:srgbClr val="FFFFFF"/>
+              </a:solidFill>
+              <a:latin typeface="Noto Sans SC" panose="020B0200000000000000" charset="-122"/>
+              <a:ea typeface="SimSun" pitchFamily="2" charset="-122"/>
+              <a:cs typeface="Noto Sans SC" panose="020B0200000000000000" charset="-122"/>
+              <a:sym typeface="Noto Sans SC" panose="020B0200000000000000" charset="-122"/>
+            </a:endParaRPr>
           </a:p>
         </p:txBody>
       </p:sp>
@@ -20108,6 +20542,15 @@
               </a:rPr>
               <a:t>预测结果</a:t>
             </a:r>
+            <a:endParaRPr lang="zh-CN" altLang="en-US" i="0" u="none" strike="noStrike">
+              <a:solidFill>
+                <a:srgbClr val="FFFFFF"/>
+              </a:solidFill>
+              <a:latin typeface="Noto Sans SC" panose="020B0200000000000000" charset="-122"/>
+              <a:ea typeface="SimSun" pitchFamily="2" charset="-122"/>
+              <a:cs typeface="Noto Sans SC" panose="020B0200000000000000" charset="-122"/>
+              <a:sym typeface="Noto Sans SC" panose="020B0200000000000000" charset="-122"/>
+            </a:endParaRPr>
           </a:p>
         </p:txBody>
       </p:sp>
@@ -20171,6 +20614,15 @@
               </a:rPr>
               <a:t>停止</a:t>
             </a:r>
+            <a:endParaRPr lang="zh-CN" altLang="en-US" i="0" u="none" strike="noStrike">
+              <a:solidFill>
+                <a:schemeClr val="bg1"/>
+              </a:solidFill>
+              <a:latin typeface="Noto Sans SC" panose="020B0200000000000000" charset="-122"/>
+              <a:ea typeface="SimSun" pitchFamily="2" charset="-122"/>
+              <a:cs typeface="Noto Sans SC" panose="020B0200000000000000" charset="-122"/>
+              <a:sym typeface="+mn-ea"/>
+            </a:endParaRPr>
           </a:p>
         </p:txBody>
       </p:sp>
@@ -20258,6 +20710,15 @@
               </a:rPr>
               <a:t>损失</a:t>
             </a:r>
+            <a:endParaRPr lang="zh-CN" altLang="en-US" i="0" u="none" strike="noStrike">
+              <a:solidFill>
+                <a:srgbClr val="FFFFFF"/>
+              </a:solidFill>
+              <a:latin typeface="Noto Sans SC" panose="020B0200000000000000" charset="-122"/>
+              <a:ea typeface="SimSun" pitchFamily="2" charset="-122"/>
+              <a:cs typeface="Noto Sans SC" panose="020B0200000000000000" charset="-122"/>
+              <a:sym typeface="Noto Sans SC" panose="020B0200000000000000" charset="-122"/>
+            </a:endParaRPr>
           </a:p>
         </p:txBody>
       </p:sp>
@@ -20310,6 +20771,11 @@
                 </a:rPr>
                 <a:t>模型预测</a:t>
               </a:r>
+              <a:endParaRPr lang="zh-CN" sz="1600">
+                <a:solidFill>
+                  <a:srgbClr val="00E5FF"/>
+                </a:solidFill>
+              </a:endParaRPr>
             </a:p>
           </p:txBody>
         </p:sp>
@@ -20400,6 +20866,11 @@
                 </a:rPr>
                 <a:t>调整模型</a:t>
               </a:r>
+              <a:endParaRPr lang="zh-CN" sz="1600">
+                <a:solidFill>
+                  <a:srgbClr val="FFE3B1"/>
+                </a:solidFill>
+              </a:endParaRPr>
             </a:p>
             <a:p>
               <a:pPr algn="ctr">
@@ -20415,6 +20886,11 @@
                 </a:rPr>
                 <a:t>参数</a:t>
               </a:r>
+              <a:endParaRPr lang="zh-CN" sz="1600">
+                <a:solidFill>
+                  <a:srgbClr val="FFE3B1"/>
+                </a:solidFill>
+              </a:endParaRPr>
             </a:p>
           </p:txBody>
         </p:sp>
@@ -20556,6 +21032,11 @@
                   </a:rPr>
                   <a:t>对比预测</a:t>
                 </a:r>
+                <a:endParaRPr lang="zh-CN" sz="1600">
+                  <a:solidFill>
+                    <a:srgbClr val="B388FF"/>
+                  </a:solidFill>
+                </a:endParaRPr>
               </a:p>
             </p:txBody>
           </p:sp>
@@ -20595,6 +21076,11 @@
                 </a:rPr>
                 <a:t>和理想结果</a:t>
               </a:r>
+              <a:endParaRPr lang="zh-CN" sz="1600">
+                <a:solidFill>
+                  <a:srgbClr val="B388FF"/>
+                </a:solidFill>
+              </a:endParaRPr>
             </a:p>
           </p:txBody>
         </p:sp>
@@ -20648,6 +21134,11 @@
                 </a:rPr>
                 <a:t>错误很少</a:t>
               </a:r>
+              <a:endParaRPr lang="zh-CN" sz="1600">
+                <a:solidFill>
+                  <a:srgbClr val="69F0AE"/>
+                </a:solidFill>
+              </a:endParaRPr>
             </a:p>
           </p:txBody>
         </p:sp>
@@ -20739,6 +21230,11 @@
                 </a:rPr>
                 <a:t>误差很小</a:t>
               </a:r>
+              <a:endParaRPr lang="zh-CN" sz="1600">
+                <a:solidFill>
+                  <a:srgbClr val="69F0AE"/>
+                </a:solidFill>
+              </a:endParaRPr>
             </a:p>
           </p:txBody>
         </p:sp>
@@ -21795,6 +22291,7 @@
               <a:rPr lang="zh-CN" altLang="en-US"/>
               <a:t>模型的训练过程</a:t>
             </a:r>
+            <a:endParaRPr lang="zh-CN" altLang="en-US"/>
           </a:p>
         </p:txBody>
       </p:sp>
@@ -21819,6 +22316,7 @@
                   <a:rPr lang="zh-CN" altLang="en-US" dirty="0"/>
                   <a:t>找到用参数描述数据的最优方式</a:t>
                 </a:r>
+                <a:endParaRPr lang="zh-CN" altLang="en-US" dirty="0"/>
               </a:p>
               <a:p>
                 <a:pPr lvl="1"/>
@@ -21826,6 +22324,7 @@
                   <a:rPr lang="zh-CN" altLang="en-US" dirty="0"/>
                   <a:t>类似于寻找一片有丘陵和坑洼的地带海拔最低的地方</a:t>
                 </a:r>
+                <a:endParaRPr lang="zh-CN" altLang="en-US" dirty="0"/>
               </a:p>
               <a:p>
                 <a:pPr lvl="1"/>
@@ -21833,6 +22332,7 @@
                   <a:rPr lang="zh-CN" altLang="en-US" dirty="0"/>
                   <a:t>“地形”由训练数据决定</a:t>
                 </a:r>
+                <a:endParaRPr lang="zh-CN" altLang="en-US" dirty="0"/>
               </a:p>
               <a:p>
                 <a:pPr lvl="0"/>
@@ -21855,6 +22355,7 @@
                   <a:rPr lang="zh-CN" altLang="en-US" dirty="0"/>
                   <a:t>：</a:t>
                 </a:r>
+                <a:endParaRPr lang="zh-CN" altLang="en-US" dirty="0"/>
               </a:p>
               <a:p>
                 <a:pPr lvl="1"/>
@@ -21862,6 +22363,7 @@
                   <a:rPr lang="en-US" altLang="zh-CN" dirty="0"/>
                   <a:t>X=a, Y=b</a:t>
                 </a:r>
+                <a:endParaRPr lang="en-US" altLang="zh-CN" dirty="0"/>
               </a:p>
               <a:p>
                 <a:pPr lvl="1"/>
@@ -21877,6 +22379,11 @@
                   </a:rPr>
                   <a:t>Δ</a:t>
                 </a:r>
+                <a:endParaRPr lang="en-US" altLang="zh-CN" dirty="0">
+                  <a:latin typeface="Noto Sans CJK SC" panose="020B0500000000000000" charset="-122"/>
+                  <a:ea typeface="Noto Sans CJK SC" panose="020B0500000000000000" charset="-122"/>
+                  <a:sym typeface="+mn-ea"/>
+                </a:endParaRPr>
               </a:p>
               <a:p>
                 <a:pPr lvl="1"/>
@@ -21985,17 +22492,17 @@
             <p:nvSpPr>
               <p:cNvPr id="3" name="内容占位符 2"/>
               <p:cNvSpPr>
-                <a:spLocks noGrp="1" noRot="1" noChangeAspect="1" noMove="1" noResize="1" noEditPoints="1" noAdjustHandles="1" noChangeArrowheads="1" noChangeShapeType="1" noTextEdit="1"/>
+                <a:spLocks noRot="1" noChangeAspect="1" noMove="1" noResize="1" noEditPoints="1" noAdjustHandles="1" noChangeArrowheads="1" noChangeShapeType="1" noTextEdit="1"/>
               </p:cNvSpPr>
               <p:nvPr>
                 <p:ph idx="1"/>
               </p:nvPr>
             </p:nvSpPr>
             <p:spPr>
-              <a:blipFill>
-                <a:blip r:embed="rId3"/>
+              <a:blipFill rotWithShape="1">
+                <a:blip r:embed="rId1"/>
                 <a:stretch>
-                  <a:fillRect l="-528"/>
+                  <a:fillRect/>
                 </a:stretch>
               </a:blipFill>
             </p:spPr>
@@ -22031,7 +22538,6 @@
           <a:p>
             <a:fld id="{49AE70B2-8BF9-45C0-BB95-33D1B9D3A854}" type="slidenum">
               <a:rPr lang="zh-CN" altLang="en-US" smtClean="0"/>
-              <a:t>7</a:t>
             </a:fld>
             <a:endParaRPr lang="en-US" altLang="zh-CN"/>
           </a:p>
@@ -22044,7 +22550,7 @@
           <p:nvPr/>
         </p:nvPicPr>
         <p:blipFill>
-          <a:blip r:embed="rId4"/>
+          <a:blip r:embed="rId2"/>
           <a:stretch>
             <a:fillRect/>
           </a:stretch>
@@ -22595,6 +23101,7 @@
               <a:rPr lang="zh-CN" altLang="en-US"/>
               <a:t>三个训练阶段</a:t>
             </a:r>
+            <a:endParaRPr lang="zh-CN" altLang="en-US"/>
           </a:p>
         </p:txBody>
       </p:sp>
@@ -22615,7 +23122,6 @@
           <a:p>
             <a:fld id="{49AE70B2-8BF9-45C0-BB95-33D1B9D3A854}" type="slidenum">
               <a:rPr lang="zh-CN" altLang="en-US" smtClean="0"/>
-              <a:t>8</a:t>
             </a:fld>
             <a:endParaRPr lang="en-US" altLang="zh-CN"/>
           </a:p>
@@ -22673,7 +23179,6 @@
               <a:pPr algn="ctr">
                 <a:defRPr/>
               </a:pPr>
-              <a:endParaRPr/>
             </a:p>
           </p:txBody>
         </p:sp>
@@ -22711,7 +23216,6 @@
               <a:pPr algn="ctr">
                 <a:defRPr/>
               </a:pPr>
-              <a:endParaRPr/>
             </a:p>
           </p:txBody>
         </p:sp>
@@ -22770,6 +23274,15 @@
                 </a:rPr>
                 <a:t>预训练</a:t>
               </a:r>
+              <a:endParaRPr lang="zh-CN" altLang="en-US" sz="2400" b="1" i="0" u="none" strike="noStrike">
+                <a:solidFill>
+                  <a:srgbClr val="69F0AE"/>
+                </a:solidFill>
+                <a:latin typeface="Noto Sans SC"/>
+                <a:ea typeface="SimSun" charset="0"/>
+                <a:cs typeface="Noto Sans SC"/>
+                <a:sym typeface="Noto Sans SC"/>
+              </a:endParaRPr>
             </a:p>
           </p:txBody>
         </p:sp>
@@ -22816,6 +23329,15 @@
                 </a:rPr>
                 <a:t>在大量文本上学规律，预训练后的模型行文连贯、符合语法，但不一定会按指令完成任务。</a:t>
               </a:r>
+              <a:endParaRPr lang="zh-CN" altLang="en-US" sz="1600" b="0" i="0" u="none" strike="noStrike">
+                <a:solidFill>
+                  <a:srgbClr val="AAAAAA"/>
+                </a:solidFill>
+                <a:latin typeface="Noto Sans SC"/>
+                <a:ea typeface="SimSun" charset="0"/>
+                <a:cs typeface="Noto Sans SC"/>
+                <a:sym typeface="Noto Sans SC"/>
+              </a:endParaRPr>
             </a:p>
           </p:txBody>
         </p:sp>
@@ -22872,7 +23394,6 @@
               <a:pPr algn="ctr">
                 <a:defRPr/>
               </a:pPr>
-              <a:endParaRPr/>
             </a:p>
           </p:txBody>
         </p:sp>
@@ -22910,7 +23431,6 @@
               <a:pPr algn="ctr">
                 <a:defRPr/>
               </a:pPr>
-              <a:endParaRPr/>
             </a:p>
           </p:txBody>
         </p:sp>
@@ -22969,6 +23489,15 @@
                 </a:rPr>
                 <a:t>后训练</a:t>
               </a:r>
+              <a:endParaRPr lang="zh-CN" altLang="en-US" sz="2400" b="1" i="0" u="none" strike="noStrike">
+                <a:solidFill>
+                  <a:srgbClr val="B388FF"/>
+                </a:solidFill>
+                <a:latin typeface="Noto Sans SC"/>
+                <a:ea typeface="Noto Sans SC"/>
+                <a:cs typeface="Noto Sans SC"/>
+                <a:sym typeface="Noto Sans SC"/>
+              </a:endParaRPr>
             </a:p>
           </p:txBody>
         </p:sp>
@@ -23014,6 +23543,14 @@
                 </a:rPr>
                 <a:t>学习根据任务说明后回答的方法，更能遵守用户要求、按格式输出</a:t>
               </a:r>
+              <a:endParaRPr lang="zh-CN" altLang="en-US" sz="1600">
+                <a:solidFill>
+                  <a:srgbClr val="AAAAAA"/>
+                </a:solidFill>
+                <a:latin typeface="Noto Sans SC"/>
+                <a:ea typeface="SimSun" charset="0"/>
+                <a:cs typeface="Noto Sans SC"/>
+              </a:endParaRPr>
             </a:p>
           </p:txBody>
         </p:sp>
@@ -23070,7 +23607,6 @@
               <a:pPr algn="ctr">
                 <a:defRPr/>
               </a:pPr>
-              <a:endParaRPr/>
             </a:p>
           </p:txBody>
         </p:sp>
@@ -23108,7 +23644,6 @@
               <a:pPr algn="ctr">
                 <a:defRPr/>
               </a:pPr>
-              <a:endParaRPr/>
             </a:p>
           </p:txBody>
         </p:sp>
@@ -23167,6 +23702,15 @@
                 </a:rPr>
                 <a:t>偏好优化/强化训练</a:t>
               </a:r>
+              <a:endParaRPr lang="zh-CN" altLang="en-US" sz="2400" b="1" i="0" u="none" strike="noStrike">
+                <a:solidFill>
+                  <a:srgbClr val="00E5FF"/>
+                </a:solidFill>
+                <a:latin typeface="Noto Sans SC"/>
+                <a:ea typeface="Noto Sans SC"/>
+                <a:cs typeface="Noto Sans SC"/>
+                <a:sym typeface="Noto Sans SC"/>
+              </a:endParaRPr>
             </a:p>
           </p:txBody>
         </p:sp>
@@ -23212,6 +23756,14 @@
                 </a:rPr>
                 <a:t>根据人类反馈在多个候选里选更优的文本，让模型更“听话、好用、安全”，适应多轮对话、拒绝危险请求</a:t>
               </a:r>
+              <a:endParaRPr lang="zh-CN" altLang="en-US" sz="1600">
+                <a:solidFill>
+                  <a:srgbClr val="AAAAAA"/>
+                </a:solidFill>
+                <a:latin typeface="Noto Sans SC"/>
+                <a:ea typeface="SimSun" charset="0"/>
+                <a:cs typeface="Noto Sans SC"/>
+              </a:endParaRPr>
             </a:p>
           </p:txBody>
         </p:sp>
@@ -23225,7 +23777,7 @@
           <p:nvPr/>
         </p:nvPicPr>
         <p:blipFill>
-          <a:blip r:embed="rId3"/>
+          <a:blip r:embed="rId1"/>
           <a:srcRect l="16663" r="16662"/>
           <a:stretch>
             <a:fillRect/>
@@ -23262,7 +23814,7 @@
           <p:nvPr/>
         </p:nvPicPr>
         <p:blipFill>
-          <a:blip r:embed="rId4"/>
+          <a:blip r:embed="rId2"/>
           <a:srcRect l="16706" r="16706"/>
           <a:stretch>
             <a:fillRect/>
@@ -23299,7 +23851,7 @@
           <p:nvPr/>
         </p:nvPicPr>
         <p:blipFill>
-          <a:blip r:embed="rId5"/>
+          <a:blip r:embed="rId3"/>
           <a:srcRect t="23" b="23"/>
           <a:stretch>
             <a:fillRect/>
@@ -23694,6 +24246,7 @@
               <a:rPr lang="zh-CN" altLang="en-US"/>
               <a:t>训练文本</a:t>
             </a:r>
+            <a:endParaRPr lang="zh-CN" altLang="en-US"/>
           </a:p>
         </p:txBody>
       </p:sp>
@@ -23724,6 +24277,7 @@
               <a:rPr lang="zh-CN" altLang="en-US"/>
               <a:t>强化训练）</a:t>
             </a:r>
+            <a:endParaRPr lang="zh-CN" altLang="en-US"/>
           </a:p>
         </p:txBody>
       </p:sp>
@@ -23765,6 +24319,7 @@
               <a:rPr lang="en-US" altLang="zh-CN"/>
               <a:t> token</a:t>
             </a:r>
+            <a:endParaRPr lang="en-US" altLang="zh-CN"/>
           </a:p>
           <a:p>
             <a:pPr>
@@ -23776,6 +24331,7 @@
               <a:rPr lang="zh-CN" altLang="en-US"/>
               <a:t>分角色：</a:t>
             </a:r>
+            <a:endParaRPr lang="zh-CN" altLang="en-US"/>
           </a:p>
           <a:p>
             <a:pPr lvl="1">
@@ -23791,6 +24347,7 @@
               <a:rPr lang="en-US" altLang="zh-CN"/>
               <a:t>&lt;system&gt;</a:t>
             </a:r>
+            <a:endParaRPr lang="en-US" altLang="zh-CN"/>
           </a:p>
           <a:p>
             <a:pPr lvl="1">
@@ -23806,6 +24363,7 @@
               <a:rPr lang="en-US" altLang="zh-CN"/>
               <a:t>&lt;user&gt;</a:t>
             </a:r>
+            <a:endParaRPr lang="en-US" altLang="zh-CN"/>
           </a:p>
           <a:p>
             <a:pPr lvl="1">
@@ -23821,6 +24379,7 @@
               <a:rPr lang="en-US" altLang="zh-CN"/>
               <a:t>&lt;assistant&gt;</a:t>
             </a:r>
+            <a:endParaRPr lang="en-US" altLang="zh-CN"/>
           </a:p>
           <a:p>
             <a:pPr lvl="0">
@@ -23844,6 +24403,7 @@
               <a:rPr lang="en-US" altLang="zh-CN" sz="2000"/>
               <a:t>(developer)</a:t>
             </a:r>
+            <a:endParaRPr lang="en-US" altLang="zh-CN" sz="2000"/>
           </a:p>
         </p:txBody>
       </p:sp>
@@ -23866,6 +24426,7 @@
               <a:rPr lang="zh-CN" altLang="en-US"/>
               <a:t>示例</a:t>
             </a:r>
+            <a:endParaRPr lang="zh-CN" altLang="en-US"/>
           </a:p>
         </p:txBody>
       </p:sp>
@@ -23937,6 +24498,9 @@
               </a:rPr>
               <a:t>&lt;/system&gt;</a:t>
             </a:r>
+            <a:endParaRPr lang="en-US" altLang="zh-CN" sz="1600">
+              <a:sym typeface="+mn-ea"/>
+            </a:endParaRPr>
           </a:p>
           <a:p>
             <a:pPr marL="0" indent="0" fontAlgn="auto">
@@ -23954,6 +24518,9 @@
               </a:rPr>
               <a:t>&lt;user&gt;</a:t>
             </a:r>
+            <a:endParaRPr lang="en-US" altLang="zh-CN" sz="1600">
+              <a:sym typeface="+mn-ea"/>
+            </a:endParaRPr>
           </a:p>
           <a:p>
             <a:pPr marL="0" indent="0" fontAlgn="auto">
@@ -24043,6 +24610,9 @@
               </a:rPr>
               <a:t>&lt;/assistant&gt;</a:t>
             </a:r>
+            <a:endParaRPr lang="en-US" altLang="zh-CN" sz="1600">
+              <a:sym typeface="+mn-ea"/>
+            </a:endParaRPr>
           </a:p>
         </p:txBody>
       </p:sp>
@@ -24063,7 +24633,6 @@
           <a:p>
             <a:fld id="{49AE70B2-8BF9-45C0-BB95-33D1B9D3A854}" type="slidenum">
               <a:rPr lang="zh-CN" altLang="en-US" smtClean="0"/>
-              <a:t>9</a:t>
             </a:fld>
             <a:endParaRPr lang="en-US" altLang="zh-CN"/>
           </a:p>
@@ -25217,8 +25786,6 @@
       </a:bgFillStyleLst>
     </a:fmtScheme>
   </a:themeElements>
-  <a:objectDefaults/>
-  <a:extraClrSchemeLst/>
   <a:extLst>
     <a:ext uri="{05A4C25C-085E-4340-85A3-A5531E510DB2}">
       <thm15:themeFamily xmlns:thm15="http://schemas.microsoft.com/office/thememl/2012/main" name="Office Theme" id="{62F939B6-93AF-4DB8-9C6B-D6C7DFDC589F}" vid="{4A3C46E8-61CC-4603-A589-7422A47A8E4A}"/>
@@ -25470,8 +26037,6 @@
       </a:bgFillStyleLst>
     </a:fmtScheme>
   </a:themeElements>
-  <a:objectDefaults/>
-  <a:extraClrSchemeLst/>
   <a:extLst>
     <a:ext uri="{05A4C25C-085E-4340-85A3-A5531E510DB2}">
       <thm15:themeFamily xmlns:thm15="http://schemas.microsoft.com/office/thememl/2012/main" name="Office Theme" id="{62F939B6-93AF-4DB8-9C6B-D6C7DFDC589F}" vid="{4A3C46E8-61CC-4603-A589-7422A47A8E4A}"/>
@@ -25723,8 +26288,6 @@
       </a:bgFillStyleLst>
     </a:fmtScheme>
   </a:themeElements>
-  <a:objectDefaults/>
-  <a:extraClrSchemeLst/>
   <a:extLst>
     <a:ext uri="{05A4C25C-085E-4340-85A3-A5531E510DB2}">
       <thm15:themeFamily xmlns:thm15="http://schemas.microsoft.com/office/thememl/2012/main" name="Office Theme" id="{62F939B6-93AF-4DB8-9C6B-D6C7DFDC589F}" vid="{4A3C46E8-61CC-4603-A589-7422A47A8E4A}"/>
